--- a/docs/v12.1_簡報_口頭報告.pptx
+++ b/docs/v12.1_簡報_口頭報告.pptx
@@ -21,9 +21,11 @@
     <p:sldId id="269" r:id="rId15"/>
     <p:sldId id="270" r:id="rId16"/>
     <p:sldId id="271" r:id="rId17"/>
+    <p:sldId id="272" r:id="rId18"/>
+    <p:sldId id="273" r:id="rId19"/>
   </p:sldIdLst>
   <p:notesMasterIdLst>
-    <p:notesMasterId r:id="rId18"/>
+    <p:notesMasterId r:id="rId20"/>
   </p:notesMasterIdLst>
   <p:sldSz cx="12192000" cy="6858000"/>
   <p:notesSz cx="6858000" cy="12192000"/>
@@ -537,6 +539,598 @@
 </c:chartSpace>
 </file>
 
+<file path=ppt/charts/chart2.xml><?xml version="1.0" encoding="utf-8"?>
+<c:chartSpace xmlns:c="http://schemas.openxmlformats.org/drawingml/2006/chart" xmlns:a="http://schemas.openxmlformats.org/drawingml/2006/main" xmlns:r="http://schemas.openxmlformats.org/officeDocument/2006/relationships">
+  <c:date1904 val="0"/>
+  <c:roundedCorners val="1"/>
+  <c:chart>
+    <c:autoTitleDeleted val="1"/>
+    <c:plotArea>
+      <c:layout/>
+      <c:barChart>
+        <c:barDir val="col"/>
+        <c:grouping val="stacked"/>
+        <c:varyColors val="0"/>
+        <c:ser>
+          <c:idx val="0"/>
+          <c:order val="0"/>
+          <c:tx>
+            <c:strRef>
+              <c:f>Sheet1!$B$1</c:f>
+              <c:strCache>
+                <c:ptCount val="1"/>
+                <c:pt idx="0">
+                  <c:v>12 類資料集（06/07）</c:v>
+                </c:pt>
+              </c:strCache>
+            </c:strRef>
+          </c:tx>
+          <c:spPr>
+            <a:solidFill>
+              <a:srgbClr val="A8C4B4"/>
+            </a:solidFill>
+            <a:effectLst/>
+          </c:spPr>
+          <c:invertIfNegative val="0"/>
+          <c:dLbls>
+            <c:numFmt formatCode="0.000" sourceLinked="0"/>
+            <c:txPr>
+              <a:bodyPr/>
+              <a:lstStyle/>
+              <a:p>
+                <a:pPr>
+                  <a:defRPr b="0" i="0" strike="noStrike" sz="1000" u="none">
+                    <a:solidFill>
+                      <a:srgbClr val="FFFFFF"/>
+                    </a:solidFill>
+                    <a:latin typeface="Microsoft JhengHei"/>
+                  </a:defRPr>
+                </a:pPr>
+              </a:p>
+            </c:txPr>
+            <c:dLblPos val="inEnd"/>
+            <c:showLegendKey val="0"/>
+            <c:showVal val="1"/>
+            <c:showCatName val="0"/>
+            <c:showSerName val="0"/>
+            <c:showPercent val="0"/>
+            <c:showBubbleSize val="0"/>
+            <c:showLeaderLines val="0"/>
+          </c:dLbls>
+          <c:cat>
+            <c:multiLvlStrRef>
+              <c:f>Sheet1!$A$2:$A$13</c:f>
+              <c:multiLvlStrCache>
+                <c:ptCount val="12"/>
+                <c:lvl>
+                  <c:pt idx="0">
+                    <c:v>06 large</c:v>
+                  </c:pt>
+                  <c:pt idx="1">
+                    <c:v>06 nano</c:v>
+                  </c:pt>
+                  <c:pt idx="2">
+                    <c:v>06 n+P2</c:v>
+                  </c:pt>
+                  <c:pt idx="3">
+                    <c:v>06 微調</c:v>
+                  </c:pt>
+                  <c:pt idx="4">
+                    <c:v>06 SSD-L</c:v>
+                  </c:pt>
+                  <c:pt idx="5">
+                    <c:v>06 SSD-S</c:v>
+                  </c:pt>
+                  <c:pt idx="6">
+                    <c:v>v8</c:v>
+                  </c:pt>
+                  <c:pt idx="7">
+                    <c:v>v9</c:v>
+                  </c:pt>
+                  <c:pt idx="8">
+                    <c:v>v10</c:v>
+                  </c:pt>
+                  <c:pt idx="9">
+                    <c:v>v11</c:v>
+                  </c:pt>
+                  <c:pt idx="10">
+                    <c:v>v11.5</c:v>
+                  </c:pt>
+                  <c:pt idx="11">
+                    <c:v>v12s</c:v>
+                  </c:pt>
+                </c:lvl>
+              </c:multiLvlStrCache>
+            </c:multiLvlStrRef>
+          </c:cat>
+          <c:val>
+            <c:numRef>
+              <c:f>Sheet1!$B$2:$B$13</c:f>
+              <c:numCache>
+                <c:formatCode>General</c:formatCode>
+                <c:ptCount val="12"/>
+                <c:pt idx="0">
+                  <c:v>0.871</c:v>
+                </c:pt>
+                <c:pt idx="1">
+                  <c:v>0.854</c:v>
+                </c:pt>
+                <c:pt idx="2">
+                  <c:v>0.851</c:v>
+                </c:pt>
+                <c:pt idx="3">
+                  <c:v>0.846</c:v>
+                </c:pt>
+                <c:pt idx="4">
+                  <c:v>0.472</c:v>
+                </c:pt>
+                <c:pt idx="5">
+                  <c:v>0.453</c:v>
+                </c:pt>
+                <c:pt idx="6">
+                  <c:v/>
+                </c:pt>
+                <c:pt idx="7">
+                  <c:v/>
+                </c:pt>
+                <c:pt idx="8">
+                  <c:v/>
+                </c:pt>
+                <c:pt idx="9">
+                  <c:v/>
+                </c:pt>
+                <c:pt idx="10">
+                  <c:v/>
+                </c:pt>
+                <c:pt idx="11">
+                  <c:v/>
+                </c:pt>
+              </c:numCache>
+            </c:numRef>
+          </c:val>
+        </c:ser>
+        <c:ser>
+          <c:idx val="1"/>
+          <c:order val="1"/>
+          <c:tx>
+            <c:strRef>
+              <c:f>Sheet1!$C$1</c:f>
+              <c:strCache>
+                <c:ptCount val="1"/>
+                <c:pt idx="0">
+                  <c:v>v5・v5r（8 類）</c:v>
+                </c:pt>
+              </c:strCache>
+            </c:strRef>
+          </c:tx>
+          <c:spPr>
+            <a:solidFill>
+              <a:srgbClr val="5E8F73"/>
+            </a:solidFill>
+            <a:effectLst/>
+          </c:spPr>
+          <c:invertIfNegative val="0"/>
+          <c:dLbls>
+            <c:numFmt formatCode="0.000" sourceLinked="0"/>
+            <c:txPr>
+              <a:bodyPr/>
+              <a:lstStyle/>
+              <a:p>
+                <a:pPr>
+                  <a:defRPr b="0" i="0" strike="noStrike" sz="1000" u="none">
+                    <a:solidFill>
+                      <a:srgbClr val="FFFFFF"/>
+                    </a:solidFill>
+                    <a:latin typeface="Microsoft JhengHei"/>
+                  </a:defRPr>
+                </a:pPr>
+              </a:p>
+            </c:txPr>
+            <c:dLblPos val="inEnd"/>
+            <c:showLegendKey val="0"/>
+            <c:showVal val="1"/>
+            <c:showCatName val="0"/>
+            <c:showSerName val="0"/>
+            <c:showPercent val="0"/>
+            <c:showBubbleSize val="0"/>
+            <c:showLeaderLines val="0"/>
+          </c:dLbls>
+          <c:cat>
+            <c:multiLvlStrRef>
+              <c:f>Sheet1!$A$2:$A$13</c:f>
+              <c:multiLvlStrCache>
+                <c:ptCount val="12"/>
+                <c:lvl>
+                  <c:pt idx="0">
+                    <c:v>06 large</c:v>
+                  </c:pt>
+                  <c:pt idx="1">
+                    <c:v>06 nano</c:v>
+                  </c:pt>
+                  <c:pt idx="2">
+                    <c:v>06 n+P2</c:v>
+                  </c:pt>
+                  <c:pt idx="3">
+                    <c:v>06 微調</c:v>
+                  </c:pt>
+                  <c:pt idx="4">
+                    <c:v>06 SSD-L</c:v>
+                  </c:pt>
+                  <c:pt idx="5">
+                    <c:v>06 SSD-S</c:v>
+                  </c:pt>
+                  <c:pt idx="6">
+                    <c:v>v8</c:v>
+                  </c:pt>
+                  <c:pt idx="7">
+                    <c:v>v9</c:v>
+                  </c:pt>
+                  <c:pt idx="8">
+                    <c:v>v10</c:v>
+                  </c:pt>
+                  <c:pt idx="9">
+                    <c:v>v11</c:v>
+                  </c:pt>
+                  <c:pt idx="10">
+                    <c:v>v11.5</c:v>
+                  </c:pt>
+                  <c:pt idx="11">
+                    <c:v>v12s</c:v>
+                  </c:pt>
+                </c:lvl>
+              </c:multiLvlStrCache>
+            </c:multiLvlStrRef>
+          </c:cat>
+          <c:val>
+            <c:numRef>
+              <c:f>Sheet1!$C$2:$C$13</c:f>
+              <c:numCache>
+                <c:formatCode>General</c:formatCode>
+                <c:ptCount val="12"/>
+                <c:pt idx="0">
+                  <c:v/>
+                </c:pt>
+                <c:pt idx="1">
+                  <c:v/>
+                </c:pt>
+                <c:pt idx="2">
+                  <c:v/>
+                </c:pt>
+                <c:pt idx="3">
+                  <c:v/>
+                </c:pt>
+                <c:pt idx="4">
+                  <c:v/>
+                </c:pt>
+                <c:pt idx="5">
+                  <c:v/>
+                </c:pt>
+                <c:pt idx="6">
+                  <c:v>0.821</c:v>
+                </c:pt>
+                <c:pt idx="7">
+                  <c:v>0.867</c:v>
+                </c:pt>
+                <c:pt idx="8">
+                  <c:v/>
+                </c:pt>
+                <c:pt idx="9">
+                  <c:v/>
+                </c:pt>
+                <c:pt idx="10">
+                  <c:v/>
+                </c:pt>
+                <c:pt idx="11">
+                  <c:v/>
+                </c:pt>
+              </c:numCache>
+            </c:numRef>
+          </c:val>
+        </c:ser>
+        <c:ser>
+          <c:idx val="2"/>
+          <c:order val="2"/>
+          <c:tx>
+            <c:strRef>
+              <c:f>Sheet1!$D$1</c:f>
+              <c:strCache>
+                <c:ptCount val="1"/>
+                <c:pt idx="0">
+                  <c:v>v5.5・v5.6（9 類，現行）</c:v>
+                </c:pt>
+              </c:strCache>
+            </c:strRef>
+          </c:tx>
+          <c:spPr>
+            <a:solidFill>
+              <a:srgbClr val="2C5F45"/>
+            </a:solidFill>
+            <a:effectLst/>
+          </c:spPr>
+          <c:invertIfNegative val="0"/>
+          <c:dLbls>
+            <c:numFmt formatCode="0.000" sourceLinked="0"/>
+            <c:txPr>
+              <a:bodyPr/>
+              <a:lstStyle/>
+              <a:p>
+                <a:pPr>
+                  <a:defRPr b="0" i="0" strike="noStrike" sz="1000" u="none">
+                    <a:solidFill>
+                      <a:srgbClr val="FFFFFF"/>
+                    </a:solidFill>
+                    <a:latin typeface="Microsoft JhengHei"/>
+                  </a:defRPr>
+                </a:pPr>
+              </a:p>
+            </c:txPr>
+            <c:dLblPos val="inEnd"/>
+            <c:showLegendKey val="0"/>
+            <c:showVal val="1"/>
+            <c:showCatName val="0"/>
+            <c:showSerName val="0"/>
+            <c:showPercent val="0"/>
+            <c:showBubbleSize val="0"/>
+            <c:showLeaderLines val="0"/>
+          </c:dLbls>
+          <c:cat>
+            <c:multiLvlStrRef>
+              <c:f>Sheet1!$A$2:$A$13</c:f>
+              <c:multiLvlStrCache>
+                <c:ptCount val="12"/>
+                <c:lvl>
+                  <c:pt idx="0">
+                    <c:v>06 large</c:v>
+                  </c:pt>
+                  <c:pt idx="1">
+                    <c:v>06 nano</c:v>
+                  </c:pt>
+                  <c:pt idx="2">
+                    <c:v>06 n+P2</c:v>
+                  </c:pt>
+                  <c:pt idx="3">
+                    <c:v>06 微調</c:v>
+                  </c:pt>
+                  <c:pt idx="4">
+                    <c:v>06 SSD-L</c:v>
+                  </c:pt>
+                  <c:pt idx="5">
+                    <c:v>06 SSD-S</c:v>
+                  </c:pt>
+                  <c:pt idx="6">
+                    <c:v>v8</c:v>
+                  </c:pt>
+                  <c:pt idx="7">
+                    <c:v>v9</c:v>
+                  </c:pt>
+                  <c:pt idx="8">
+                    <c:v>v10</c:v>
+                  </c:pt>
+                  <c:pt idx="9">
+                    <c:v>v11</c:v>
+                  </c:pt>
+                  <c:pt idx="10">
+                    <c:v>v11.5</c:v>
+                  </c:pt>
+                  <c:pt idx="11">
+                    <c:v>v12s</c:v>
+                  </c:pt>
+                </c:lvl>
+              </c:multiLvlStrCache>
+            </c:multiLvlStrRef>
+          </c:cat>
+          <c:val>
+            <c:numRef>
+              <c:f>Sheet1!$D$2:$D$13</c:f>
+              <c:numCache>
+                <c:formatCode>General</c:formatCode>
+                <c:ptCount val="12"/>
+                <c:pt idx="0">
+                  <c:v/>
+                </c:pt>
+                <c:pt idx="1">
+                  <c:v/>
+                </c:pt>
+                <c:pt idx="2">
+                  <c:v/>
+                </c:pt>
+                <c:pt idx="3">
+                  <c:v/>
+                </c:pt>
+                <c:pt idx="4">
+                  <c:v/>
+                </c:pt>
+                <c:pt idx="5">
+                  <c:v/>
+                </c:pt>
+                <c:pt idx="6">
+                  <c:v/>
+                </c:pt>
+                <c:pt idx="7">
+                  <c:v/>
+                </c:pt>
+                <c:pt idx="8">
+                  <c:v>0.799</c:v>
+                </c:pt>
+                <c:pt idx="9">
+                  <c:v>0.835</c:v>
+                </c:pt>
+                <c:pt idx="10">
+                  <c:v>0.829</c:v>
+                </c:pt>
+                <c:pt idx="11">
+                  <c:v>0.837</c:v>
+                </c:pt>
+              </c:numCache>
+            </c:numRef>
+          </c:val>
+        </c:ser>
+        <c:dLbls>
+          <c:numFmt formatCode="0.000" sourceLinked="0"/>
+          <c:txPr>
+            <a:bodyPr/>
+            <a:lstStyle/>
+            <a:p>
+              <a:pPr>
+                <a:defRPr b="0" i="0" strike="noStrike" sz="1000" u="none">
+                  <a:solidFill>
+                    <a:srgbClr val="FFFFFF"/>
+                  </a:solidFill>
+                  <a:latin typeface="Microsoft JhengHei"/>
+                </a:defRPr>
+              </a:pPr>
+            </a:p>
+          </c:txPr>
+          <c:dLblPos val="inEnd"/>
+          <c:showLegendKey val="0"/>
+          <c:showVal val="1"/>
+          <c:showCatName val="0"/>
+          <c:showSerName val="0"/>
+          <c:showPercent val="0"/>
+          <c:showBubbleSize val="0"/>
+          <c:showLeaderLines val="0"/>
+        </c:dLbls>
+        <c:gapWidth val="45"/>
+        <c:overlap val="100"/>
+        <c:axId val="2094734554"/>
+        <c:axId val="2094734552"/>
+        <c:axId val="2094734556"/>
+      </c:barChart>
+      <c:catAx>
+        <c:axId val="2094734554"/>
+        <c:scaling>
+          <c:orientation val="minMax"/>
+        </c:scaling>
+        <c:delete val="0"/>
+        <c:axPos val="b"/>
+        <c:numFmt formatCode="General" sourceLinked="1"/>
+        <c:majorTickMark val="out"/>
+        <c:minorTickMark val="none"/>
+        <c:tickLblPos val="low"/>
+        <c:spPr>
+          <a:ln w="12700" cap="flat">
+            <a:solidFill>
+              <a:srgbClr val="888888"/>
+            </a:solidFill>
+            <a:prstDash val="solid"/>
+            <a:round/>
+          </a:ln>
+        </c:spPr>
+        <c:txPr>
+          <a:bodyPr/>
+          <a:lstStyle/>
+          <a:p>
+            <a:pPr>
+              <a:defRPr sz="1100" b="0" i="0" u="none" strike="noStrike">
+                <a:solidFill>
+                  <a:srgbClr val="1A2620"/>
+                </a:solidFill>
+                <a:latin typeface="Microsoft JhengHei"/>
+              </a:defRPr>
+            </a:pPr>
+            <a:endParaRPr lang="en-US"/>
+          </a:p>
+        </c:txPr>
+        <c:crossAx val="2094734552"/>
+        <c:crosses val="autoZero"/>
+        <c:auto val="1"/>
+        <c:lblAlgn val="ctr"/>
+        <c:noMultiLvlLbl val="1"/>
+      </c:catAx>
+      <c:valAx>
+        <c:axId val="2094734552"/>
+        <c:scaling>
+          <c:orientation val="minMax"/>
+          <c:max val="1"/>
+          <c:min val="0"/>
+        </c:scaling>
+        <c:delete val="0"/>
+        <c:axPos val="l"/>
+        <c:majorGridlines>
+          <c:spPr>
+            <a:ln w="12700" cap="flat">
+              <a:solidFill>
+                <a:srgbClr val="E4EDE7"/>
+              </a:solidFill>
+              <a:prstDash val="solid"/>
+              <a:round/>
+            </a:ln>
+          </c:spPr>
+        </c:majorGridlines>
+        <c:numFmt formatCode="General" sourceLinked="0"/>
+        <c:majorTickMark val="out"/>
+        <c:minorTickMark val="none"/>
+        <c:tickLblPos val="nextTo"/>
+        <c:spPr>
+          <a:ln w="12700" cap="flat">
+            <a:solidFill>
+              <a:srgbClr val="888888"/>
+            </a:solidFill>
+            <a:prstDash val="solid"/>
+            <a:round/>
+          </a:ln>
+        </c:spPr>
+        <c:txPr>
+          <a:bodyPr/>
+          <a:lstStyle/>
+          <a:p>
+            <a:pPr>
+              <a:defRPr sz="1000" b="0" i="0" u="none" strike="noStrike">
+                <a:solidFill>
+                  <a:srgbClr val="5E6F66"/>
+                </a:solidFill>
+                <a:latin typeface="Microsoft JhengHei"/>
+              </a:defRPr>
+            </a:pPr>
+            <a:endParaRPr lang="en-US"/>
+          </a:p>
+        </c:txPr>
+        <c:crossAx val="2094734554"/>
+        <c:crosses val="autoZero"/>
+        <c:crossBetween val="between"/>
+      </c:valAx>
+      <c:spPr>
+        <a:noFill/>
+        <a:ln>
+          <a:noFill/>
+        </a:ln>
+        <a:effectLst/>
+      </c:spPr>
+    </c:plotArea>
+    <c:legend>
+      <c:legendPos val="t"/>
+      <c:overlay val="0"/>
+      <c:txPr>
+        <a:bodyPr/>
+        <a:lstStyle/>
+        <a:p>
+          <a:pPr>
+            <a:defRPr sz="1200">
+              <a:solidFill>
+                <a:srgbClr val="1A2620"/>
+              </a:solidFill>
+            </a:defRPr>
+          </a:pPr>
+          <a:endParaRPr lang="en-US"/>
+        </a:p>
+      </c:txPr>
+    </c:legend>
+    <c:plotVisOnly val="1"/>
+    <c:dispBlanksAs val="span"/>
+  </c:chart>
+  <c:spPr>
+    <a:noFill/>
+    <a:ln>
+      <a:noFill/>
+    </a:ln>
+    <a:effectLst/>
+  </c:spPr>
+  <c:externalData r:id="rId1">
+    <c:autoUpdate val="0"/>
+  </c:externalData>
+</c:chartSpace>
+</file>
+
 <file path=ppt/notesMasters/notesMaster1.xml><?xml version="1.0" encoding="utf-8"?>
 <p:notesMaster xmlns:a="http://schemas.openxmlformats.org/drawingml/2006/main" xmlns:r="http://schemas.openxmlformats.org/officeDocument/2006/relationships" xmlns:p="http://schemas.openxmlformats.org/presentationml/2006/main">
   <p:cSld>
@@ -1196,7 +1790,7 @@
           <a:p>
             <a:r>
               <a:rPr lang="en-US" dirty="0"/>
-              <a:t>被問到歷史比較時翻這頁。先講「不可直接比較」再給數字。</a:t>
+              <a:t>重點只有一句：顏色不同就不能相減。SSD 那兩根是架構問題，不是資料問題。</a:t>
             </a:r>
             <a:endParaRPr lang="en-US" dirty="0"/>
           </a:p>
@@ -1284,7 +1878,7 @@
           <a:p>
             <a:r>
               <a:rPr lang="en-US" dirty="0"/>
-              <a:t>v11 的 valid Jaccard 與 v12s 的 test Jaccard 是這次依存檔混淆矩陣新算出來的。</a:t>
+              <a:t>被問「不是變差了嗎」就翻這頁，三欄對照講完就夠。</a:t>
             </a:r>
             <a:endParaRPr lang="en-US" dirty="0"/>
           </a:p>
@@ -1372,7 +1966,7 @@
           <a:p>
             <a:r>
               <a:rPr lang="en-US" dirty="0"/>
-              <a:t>跨資料集的強弱比較在本專題沒有合法基準，唯一例外是同資料集內的對照。</a:t>
+              <a:t>被問到歷史比較時翻這頁。先講「不可直接比較」再給數字。</a:t>
             </a:r>
             <a:endParaRPr lang="en-US" dirty="0"/>
           </a:p>
@@ -1460,7 +2054,7 @@
           <a:p>
             <a:r>
               <a:rPr lang="en-US" dirty="0"/>
-              <a:t>這頁不用講，被問到再看。</a:t>
+              <a:t>v11 的 valid Jaccard 與 v12s 的 test Jaccard 是這次依存檔混淆矩陣新算出來的。</a:t>
             </a:r>
             <a:endParaRPr lang="en-US" dirty="0"/>
           </a:p>
@@ -1548,7 +2142,7 @@
           <a:p>
             <a:r>
               <a:rPr lang="en-US" dirty="0"/>
-              <a:t>收尾把兩個決策再念一次，然後開放討論。</a:t>
+              <a:t>跨資料集的強弱比較在本專題沒有合法基準，唯一例外是同資料集內的對照。</a:t>
             </a:r>
             <a:endParaRPr lang="en-US" dirty="0"/>
           </a:p>
@@ -1572,6 +2166,182 @@
             <a:fld id="{F7021451-1387-4CA6-816F-3879F97B5CBC}" type="slidenum">
               <a:rPr lang="en-US"/>
               <a:t>16</a:t>
+            </a:fld>
+            <a:endParaRPr lang="en-US"/>
+          </a:p>
+        </p:txBody>
+      </p:sp>
+    </p:spTree>
+    <p:extLst>
+      <p:ext uri="{BB962C8B-B14F-4D97-AF65-F5344CB8AC3E}">
+        <p14:creationId xmlns:p14="http://schemas.microsoft.com/office/powerpoint/2010/main" val="1024086991"/>
+      </p:ext>
+    </p:extLst>
+  </p:cSld>
+  <p:clrMapOvr>
+    <a:masterClrMapping/>
+  </p:clrMapOvr>
+</p:notes>
+</file>
+
+<file path=ppt/notesSlides/notesSlide17.xml><?xml version="1.0" encoding="utf-8"?>
+<p:notes xmlns:a="http://schemas.openxmlformats.org/drawingml/2006/main" xmlns:r="http://schemas.openxmlformats.org/officeDocument/2006/relationships" xmlns:p="http://schemas.openxmlformats.org/presentationml/2006/main">
+  <p:cSld>
+    <p:spTree>
+      <p:nvGrpSpPr>
+        <p:cNvPr id="1" name=""/>
+        <p:cNvGrpSpPr/>
+        <p:nvPr/>
+      </p:nvGrpSpPr>
+      <p:grpSpPr>
+        <a:xfrm>
+          <a:off x="0" y="0"/>
+          <a:ext cx="0" cy="0"/>
+          <a:chOff x="0" y="0"/>
+          <a:chExt cx="0" cy="0"/>
+        </a:xfrm>
+      </p:grpSpPr>
+      <p:sp>
+        <p:nvSpPr>
+          <p:cNvPr id="2" name="Slide Image Placeholder 1"/>
+          <p:cNvSpPr>
+            <a:spLocks noGrp="1" noRot="1" noChangeAspect="1"/>
+          </p:cNvSpPr>
+          <p:nvPr>
+            <p:ph type="sldImg"/>
+          </p:nvPr>
+        </p:nvSpPr>
+        <p:spPr/>
+      </p:sp>
+      <p:sp>
+        <p:nvSpPr>
+          <p:cNvPr id="3" name="Notes Placeholder 2"/>
+          <p:cNvSpPr>
+            <a:spLocks noGrp="1"/>
+          </p:cNvSpPr>
+          <p:nvPr>
+            <p:ph type="body" idx="1"/>
+          </p:nvPr>
+        </p:nvSpPr>
+        <p:spPr/>
+        <p:txBody>
+          <a:bodyPr/>
+          <a:lstStyle/>
+          <a:p>
+            <a:r>
+              <a:rPr lang="en-US" dirty="0"/>
+              <a:t>這頁不用講，被問到再看。</a:t>
+            </a:r>
+            <a:endParaRPr lang="en-US" dirty="0"/>
+          </a:p>
+        </p:txBody>
+      </p:sp>
+      <p:sp>
+        <p:nvSpPr>
+          <p:cNvPr id="4" name="Slide Number Placeholder 3"/>
+          <p:cNvSpPr>
+            <a:spLocks noGrp="1"/>
+          </p:cNvSpPr>
+          <p:nvPr>
+            <p:ph type="sldNum" sz="quarter" idx="10"/>
+          </p:nvPr>
+        </p:nvSpPr>
+        <p:spPr/>
+        <p:txBody>
+          <a:bodyPr/>
+          <a:lstStyle/>
+          <a:p>
+            <a:fld id="{F7021451-1387-4CA6-816F-3879F97B5CBC}" type="slidenum">
+              <a:rPr lang="en-US"/>
+              <a:t>17</a:t>
+            </a:fld>
+            <a:endParaRPr lang="en-US"/>
+          </a:p>
+        </p:txBody>
+      </p:sp>
+    </p:spTree>
+    <p:extLst>
+      <p:ext uri="{BB962C8B-B14F-4D97-AF65-F5344CB8AC3E}">
+        <p14:creationId xmlns:p14="http://schemas.microsoft.com/office/powerpoint/2010/main" val="1024086991"/>
+      </p:ext>
+    </p:extLst>
+  </p:cSld>
+  <p:clrMapOvr>
+    <a:masterClrMapping/>
+  </p:clrMapOvr>
+</p:notes>
+</file>
+
+<file path=ppt/notesSlides/notesSlide18.xml><?xml version="1.0" encoding="utf-8"?>
+<p:notes xmlns:a="http://schemas.openxmlformats.org/drawingml/2006/main" xmlns:r="http://schemas.openxmlformats.org/officeDocument/2006/relationships" xmlns:p="http://schemas.openxmlformats.org/presentationml/2006/main">
+  <p:cSld>
+    <p:spTree>
+      <p:nvGrpSpPr>
+        <p:cNvPr id="1" name=""/>
+        <p:cNvGrpSpPr/>
+        <p:nvPr/>
+      </p:nvGrpSpPr>
+      <p:grpSpPr>
+        <a:xfrm>
+          <a:off x="0" y="0"/>
+          <a:ext cx="0" cy="0"/>
+          <a:chOff x="0" y="0"/>
+          <a:chExt cx="0" cy="0"/>
+        </a:xfrm>
+      </p:grpSpPr>
+      <p:sp>
+        <p:nvSpPr>
+          <p:cNvPr id="2" name="Slide Image Placeholder 1"/>
+          <p:cNvSpPr>
+            <a:spLocks noGrp="1" noRot="1" noChangeAspect="1"/>
+          </p:cNvSpPr>
+          <p:nvPr>
+            <p:ph type="sldImg"/>
+          </p:nvPr>
+        </p:nvSpPr>
+        <p:spPr/>
+      </p:sp>
+      <p:sp>
+        <p:nvSpPr>
+          <p:cNvPr id="3" name="Notes Placeholder 2"/>
+          <p:cNvSpPr>
+            <a:spLocks noGrp="1"/>
+          </p:cNvSpPr>
+          <p:nvPr>
+            <p:ph type="body" idx="1"/>
+          </p:nvPr>
+        </p:nvSpPr>
+        <p:spPr/>
+        <p:txBody>
+          <a:bodyPr/>
+          <a:lstStyle/>
+          <a:p>
+            <a:r>
+              <a:rPr lang="en-US" dirty="0"/>
+              <a:t>收尾把兩個決策再念一次，然後開放討論。</a:t>
+            </a:r>
+            <a:endParaRPr lang="en-US" dirty="0"/>
+          </a:p>
+        </p:txBody>
+      </p:sp>
+      <p:sp>
+        <p:nvSpPr>
+          <p:cNvPr id="4" name="Slide Number Placeholder 3"/>
+          <p:cNvSpPr>
+            <a:spLocks noGrp="1"/>
+          </p:cNvSpPr>
+          <p:nvPr>
+            <p:ph type="sldNum" sz="quarter" idx="10"/>
+          </p:nvPr>
+        </p:nvSpPr>
+        <p:spPr/>
+        <p:txBody>
+          <a:bodyPr/>
+          <a:lstStyle/>
+          <a:p>
+            <a:fld id="{F7021451-1387-4CA6-816F-3879F97B5CBC}" type="slidenum">
+              <a:rPr lang="en-US"/>
+              <a:t>18</a:t>
             </a:fld>
             <a:endParaRPr lang="en-US"/>
           </a:p>
@@ -3571,6 +4341,1405 @@
                 <a:ea typeface="Microsoft JhengHei" pitchFamily="34" charset="-122"/>
                 <a:cs typeface="Microsoft JhengHei" pitchFamily="34" charset="-120"/>
               </a:rPr>
+              <a:t>全期 mAP50 總覽（2026-06 至今）</a:t>
+            </a:r>
+            <a:endParaRPr lang="en-US" sz="3400" dirty="0"/>
+          </a:p>
+        </p:txBody>
+      </p:sp>
+      <p:sp>
+        <p:nvSpPr>
+          <p:cNvPr id="3" name="Text 1"/>
+          <p:cNvSpPr txBox="1"/>
+          <p:nvPr/>
+        </p:nvSpPr>
+        <p:spPr>
+          <a:xfrm>
+            <a:off x="640080" y="1088136"/>
+            <a:ext cx="10911535" cy="384048"/>
+          </a:xfrm>
+          <a:prstGeom prst="rect">
+            <a:avLst/>
+          </a:prstGeom>
+          <a:noFill/>
+          <a:ln/>
+        </p:spPr>
+        <p:txBody>
+          <a:bodyPr wrap="square" lIns="0" tIns="0" rIns="0" bIns="0" rtlCol="0" anchor="ctr"/>
+          <a:lstStyle/>
+          <a:p>
+            <a:pPr algn="l" indent="0" marL="0">
+              <a:buNone/>
+            </a:pPr>
+            <a:r>
+              <a:rPr lang="en-US" sz="1500" dirty="0">
+                <a:solidFill>
+                  <a:srgbClr val="5E6F66"/>
+                </a:solidFill>
+                <a:latin typeface="Microsoft JhengHei" pitchFamily="34" charset="0"/>
+                <a:ea typeface="Microsoft JhengHei" pitchFamily="34" charset="-122"/>
+                <a:cs typeface="Microsoft JhengHei" pitchFamily="34" charset="-120"/>
+              </a:rPr>
+              <a:t>valid split —— 唯一每一期都有的量測。顏色 = 資料集世代，跨顏色不可比</a:t>
+            </a:r>
+            <a:endParaRPr lang="en-US" sz="1500" dirty="0"/>
+          </a:p>
+        </p:txBody>
+      </p:sp>
+      <p:graphicFrame>
+        <p:nvGraphicFramePr>
+          <p:cNvPr id="4" name="Chart 0" descr=""/>
+          <p:cNvGraphicFramePr/>
+          <p:nvPr/>
+        </p:nvGraphicFramePr>
+        <p:xfrm>
+          <a:off x="640080" y="1664208"/>
+          <a:ext cx="10911535" cy="3703320"/>
+        </p:xfrm>
+        <a:graphic xmlns:a="http://schemas.openxmlformats.org/drawingml/2006/main">
+          <a:graphicData uri="http://schemas.openxmlformats.org/drawingml/2006/chart">
+            <c:chart xmlns:c="http://schemas.openxmlformats.org/drawingml/2006/chart" r:id="rId1"/>
+          </a:graphicData>
+        </a:graphic>
+      </p:graphicFrame>
+      <p:sp>
+        <p:nvSpPr>
+          <p:cNvPr id="5" name="Text 2"/>
+          <p:cNvSpPr txBox="1"/>
+          <p:nvPr/>
+        </p:nvSpPr>
+        <p:spPr>
+          <a:xfrm>
+            <a:off x="640080" y="5504688"/>
+            <a:ext cx="10911535" cy="457200"/>
+          </a:xfrm>
+          <a:prstGeom prst="rect">
+            <a:avLst/>
+          </a:prstGeom>
+          <a:noFill/>
+          <a:ln/>
+        </p:spPr>
+        <p:txBody>
+          <a:bodyPr wrap="square" lIns="0" tIns="0" rIns="0" bIns="0" rtlCol="0" anchor="ctr"/>
+          <a:lstStyle/>
+          <a:p>
+            <a:pPr indent="0" marL="0">
+              <a:buNone/>
+            </a:pPr>
+            <a:r>
+              <a:rPr lang="en-US" sz="1300" dirty="0">
+                <a:solidFill>
+                  <a:srgbClr val="1A2620"/>
+                </a:solidFill>
+                <a:latin typeface="Microsoft JhengHei" pitchFamily="34" charset="0"/>
+                <a:ea typeface="Microsoft JhengHei" pitchFamily="34" charset="-122"/>
+                <a:cs typeface="Microsoft JhengHei" pitchFamily="34" charset="-120"/>
+              </a:rPr>
+              <a:t>兩個 SSD 的凹陷是架構限制（320 輸入抓不到極小目標）；其餘十個都落在 0.80–0.87，沒有趨勢可言。</a:t>
+            </a:r>
+            <a:endParaRPr lang="en-US" sz="1300" dirty="0"/>
+          </a:p>
+        </p:txBody>
+      </p:sp>
+    </p:spTree>
+  </p:cSld>
+  <p:clrMapOvr>
+    <a:masterClrMapping/>
+  </p:clrMapOvr>
+</p:sld>
+</file>
+
+<file path=ppt/slides/slide13.xml><?xml version="1.0" encoding="utf-8"?>
+<p:sld xmlns:a="http://schemas.openxmlformats.org/drawingml/2006/main" xmlns:r="http://schemas.openxmlformats.org/officeDocument/2006/relationships" xmlns:p="http://schemas.openxmlformats.org/presentationml/2006/main">
+  <p:cSld name="Slide 13">
+    <p:bg>
+      <p:bgPr>
+        <a:solidFill>
+          <a:srgbClr val="FFFFFF"/>
+        </a:solidFill>
+      </p:bgPr>
+    </p:bg>
+    <p:spTree>
+      <p:nvGrpSpPr>
+        <p:cNvPr id="1" name=""/>
+        <p:cNvGrpSpPr/>
+        <p:nvPr/>
+      </p:nvGrpSpPr>
+      <p:grpSpPr>
+        <a:xfrm>
+          <a:off x="0" y="0"/>
+          <a:ext cx="0" cy="0"/>
+          <a:chOff x="0" y="0"/>
+          <a:chExt cx="0" cy="0"/>
+        </a:xfrm>
+      </p:grpSpPr>
+      <p:sp>
+        <p:nvSpPr>
+          <p:cNvPr id="2" name="Text 0"/>
+          <p:cNvSpPr txBox="1"/>
+          <p:nvPr/>
+        </p:nvSpPr>
+        <p:spPr>
+          <a:xfrm>
+            <a:off x="640080" y="411480"/>
+            <a:ext cx="10911535" cy="658368"/>
+          </a:xfrm>
+          <a:prstGeom prst="rect">
+            <a:avLst/>
+          </a:prstGeom>
+          <a:noFill/>
+          <a:ln/>
+        </p:spPr>
+        <p:txBody>
+          <a:bodyPr wrap="square" lIns="0" tIns="0" rIns="0" bIns="0" rtlCol="0" anchor="ctr"/>
+          <a:lstStyle/>
+          <a:p>
+            <a:pPr algn="l" indent="0" marL="0">
+              <a:buNone/>
+            </a:pPr>
+            <a:r>
+              <a:rPr lang="en-US" sz="3400" b="1" dirty="0">
+                <a:solidFill>
+                  <a:srgbClr val="0F2E22"/>
+                </a:solidFill>
+                <a:latin typeface="Microsoft JhengHei" pitchFamily="34" charset="0"/>
+                <a:ea typeface="Microsoft JhengHei" pitchFamily="34" charset="-122"/>
+                <a:cs typeface="Microsoft JhengHei" pitchFamily="34" charset="-120"/>
+              </a:rPr>
+              <a:t>為什麼跨期不能相減</a:t>
+            </a:r>
+            <a:endParaRPr lang="en-US" sz="3400" dirty="0"/>
+          </a:p>
+        </p:txBody>
+      </p:sp>
+      <p:sp>
+        <p:nvSpPr>
+          <p:cNvPr id="3" name="Text 1"/>
+          <p:cNvSpPr txBox="1"/>
+          <p:nvPr/>
+        </p:nvSpPr>
+        <p:spPr>
+          <a:xfrm>
+            <a:off x="640080" y="1088136"/>
+            <a:ext cx="10911535" cy="384048"/>
+          </a:xfrm>
+          <a:prstGeom prst="rect">
+            <a:avLst/>
+          </a:prstGeom>
+          <a:noFill/>
+          <a:ln/>
+        </p:spPr>
+        <p:txBody>
+          <a:bodyPr wrap="square" lIns="0" tIns="0" rIns="0" bIns="0" rtlCol="0" anchor="ctr"/>
+          <a:lstStyle/>
+          <a:p>
+            <a:pPr algn="l" indent="0" marL="0">
+              <a:buNone/>
+            </a:pPr>
+            <a:r>
+              <a:rPr lang="en-US" sz="1500" dirty="0">
+                <a:solidFill>
+                  <a:srgbClr val="5E6F66"/>
+                </a:solidFill>
+                <a:latin typeface="Microsoft JhengHei" pitchFamily="34" charset="0"/>
+                <a:ea typeface="Microsoft JhengHei" pitchFamily="34" charset="-122"/>
+                <a:cs typeface="Microsoft JhengHei" pitchFamily="34" charset="-120"/>
+              </a:rPr>
+              <a:t>三套資料集量的根本不是同一件事</a:t>
+            </a:r>
+            <a:endParaRPr lang="en-US" sz="1500" dirty="0"/>
+          </a:p>
+        </p:txBody>
+      </p:sp>
+      <p:sp>
+        <p:nvSpPr>
+          <p:cNvPr id="4" name="Shape 2"/>
+          <p:cNvSpPr/>
+          <p:nvPr/>
+        </p:nvSpPr>
+        <p:spPr>
+          <a:xfrm>
+            <a:off x="640080" y="1664208"/>
+            <a:ext cx="3493008" cy="3703320"/>
+          </a:xfrm>
+          <a:prstGeom prst="roundRect">
+            <a:avLst>
+              <a:gd name="adj" fmla="val 2618"/>
+            </a:avLst>
+          </a:prstGeom>
+          <a:solidFill>
+            <a:srgbClr val="F6F9F7"/>
+          </a:solidFill>
+          <a:ln w="12700">
+            <a:solidFill>
+              <a:srgbClr val="F6F9F7"/>
+            </a:solidFill>
+            <a:prstDash val="solid"/>
+          </a:ln>
+        </p:spPr>
+      </p:sp>
+      <p:sp>
+        <p:nvSpPr>
+          <p:cNvPr id="5" name="Shape 3"/>
+          <p:cNvSpPr/>
+          <p:nvPr/>
+        </p:nvSpPr>
+        <p:spPr>
+          <a:xfrm>
+            <a:off x="640080" y="1664208"/>
+            <a:ext cx="3493008" cy="566928"/>
+          </a:xfrm>
+          <a:prstGeom prst="roundRect">
+            <a:avLst>
+              <a:gd name="adj" fmla="val 16129"/>
+            </a:avLst>
+          </a:prstGeom>
+          <a:solidFill>
+            <a:srgbClr val="A8C4B4"/>
+          </a:solidFill>
+          <a:ln/>
+        </p:spPr>
+      </p:sp>
+      <p:sp>
+        <p:nvSpPr>
+          <p:cNvPr id="6" name="Text 4"/>
+          <p:cNvSpPr txBox="1"/>
+          <p:nvPr/>
+        </p:nvSpPr>
+        <p:spPr>
+          <a:xfrm>
+            <a:off x="822960" y="1664208"/>
+            <a:ext cx="3127248" cy="566928"/>
+          </a:xfrm>
+          <a:prstGeom prst="rect">
+            <a:avLst/>
+          </a:prstGeom>
+          <a:noFill/>
+          <a:ln/>
+        </p:spPr>
+        <p:txBody>
+          <a:bodyPr wrap="square" lIns="0" tIns="0" rIns="0" bIns="0" rtlCol="0" anchor="ctr"/>
+          <a:lstStyle/>
+          <a:p>
+            <a:pPr indent="0" marL="0">
+              <a:buNone/>
+            </a:pPr>
+            <a:r>
+              <a:rPr lang="en-US" sz="1400" b="1" dirty="0">
+                <a:solidFill>
+                  <a:srgbClr val="0F2E22"/>
+                </a:solidFill>
+                <a:latin typeface="Microsoft JhengHei" pitchFamily="34" charset="0"/>
+                <a:ea typeface="Microsoft JhengHei" pitchFamily="34" charset="-122"/>
+                <a:cs typeface="Microsoft JhengHei" pitchFamily="34" charset="-120"/>
+              </a:rPr>
+              <a:t>12 類（2026-06/07）</a:t>
+            </a:r>
+            <a:endParaRPr lang="en-US" sz="1400" dirty="0"/>
+          </a:p>
+        </p:txBody>
+      </p:sp>
+      <p:sp>
+        <p:nvSpPr>
+          <p:cNvPr id="7" name="Text 5"/>
+          <p:cNvSpPr txBox="1"/>
+          <p:nvPr/>
+        </p:nvSpPr>
+        <p:spPr>
+          <a:xfrm>
+            <a:off x="868680" y="2395728"/>
+            <a:ext cx="3035808" cy="274320"/>
+          </a:xfrm>
+          <a:prstGeom prst="rect">
+            <a:avLst/>
+          </a:prstGeom>
+          <a:noFill/>
+          <a:ln/>
+        </p:spPr>
+        <p:txBody>
+          <a:bodyPr wrap="square" lIns="0" tIns="0" rIns="0" bIns="0" rtlCol="0" anchor="ctr"/>
+          <a:lstStyle/>
+          <a:p>
+            <a:pPr indent="0" marL="0">
+              <a:buNone/>
+            </a:pPr>
+            <a:r>
+              <a:rPr lang="en-US" sz="1100" b="1" dirty="0">
+                <a:solidFill>
+                  <a:srgbClr val="5E6F66"/>
+                </a:solidFill>
+                <a:latin typeface="Microsoft JhengHei" pitchFamily="34" charset="0"/>
+                <a:ea typeface="Microsoft JhengHei" pitchFamily="34" charset="-122"/>
+                <a:cs typeface="Microsoft JhengHei" pitchFamily="34" charset="-120"/>
+              </a:rPr>
+              <a:t>類別</a:t>
+            </a:r>
+            <a:endParaRPr lang="en-US" sz="1100" dirty="0"/>
+          </a:p>
+        </p:txBody>
+      </p:sp>
+      <p:sp>
+        <p:nvSpPr>
+          <p:cNvPr id="8" name="Text 6"/>
+          <p:cNvSpPr txBox="1"/>
+          <p:nvPr/>
+        </p:nvSpPr>
+        <p:spPr>
+          <a:xfrm>
+            <a:off x="868680" y="2670048"/>
+            <a:ext cx="3035808" cy="640080"/>
+          </a:xfrm>
+          <a:prstGeom prst="rect">
+            <a:avLst/>
+          </a:prstGeom>
+          <a:noFill/>
+          <a:ln/>
+        </p:spPr>
+        <p:txBody>
+          <a:bodyPr wrap="square" lIns="0" tIns="0" rIns="0" bIns="0" rtlCol="0" anchor="ctr"/>
+          <a:lstStyle/>
+          <a:p>
+            <a:pPr indent="0" marL="0">
+              <a:buNone/>
+            </a:pPr>
+            <a:r>
+              <a:rPr lang="en-US" sz="1300" dirty="0">
+                <a:solidFill>
+                  <a:srgbClr val="1A2620"/>
+                </a:solidFill>
+                <a:latin typeface="Microsoft JhengHei" pitchFamily="34" charset="0"/>
+                <a:ea typeface="Microsoft JhengHei" pitchFamily="34" charset="-122"/>
+                <a:cs typeface="Microsoft JhengHei" pitchFamily="34" charset="-120"/>
+              </a:rPr>
+              <a:t>12 類，其中 2 類零標註</a:t>
+            </a:r>
+            <a:endParaRPr lang="en-US" sz="1300" dirty="0"/>
+          </a:p>
+          <a:p>
+            <a:pPr indent="0" marL="0">
+              <a:buNone/>
+            </a:pPr>
+            <a:r>
+              <a:rPr lang="en-US" sz="1300" dirty="0">
+                <a:solidFill>
+                  <a:srgbClr val="1A2620"/>
+                </a:solidFill>
+                <a:latin typeface="Microsoft JhengHei" pitchFamily="34" charset="0"/>
+                <a:ea typeface="Microsoft JhengHei" pitchFamily="34" charset="-122"/>
+                <a:cs typeface="Microsoft JhengHei" pitchFamily="34" charset="-120"/>
+              </a:rPr>
+              <a:t>另含 2 個健康葉類別</a:t>
+            </a:r>
+            <a:endParaRPr lang="en-US" sz="1300" dirty="0"/>
+          </a:p>
+        </p:txBody>
+      </p:sp>
+      <p:sp>
+        <p:nvSpPr>
+          <p:cNvPr id="9" name="Text 7"/>
+          <p:cNvSpPr txBox="1"/>
+          <p:nvPr/>
+        </p:nvSpPr>
+        <p:spPr>
+          <a:xfrm>
+            <a:off x="868680" y="3383280"/>
+            <a:ext cx="3035808" cy="274320"/>
+          </a:xfrm>
+          <a:prstGeom prst="rect">
+            <a:avLst/>
+          </a:prstGeom>
+          <a:noFill/>
+          <a:ln/>
+        </p:spPr>
+        <p:txBody>
+          <a:bodyPr wrap="square" lIns="0" tIns="0" rIns="0" bIns="0" rtlCol="0" anchor="ctr"/>
+          <a:lstStyle/>
+          <a:p>
+            <a:pPr indent="0" marL="0">
+              <a:buNone/>
+            </a:pPr>
+            <a:r>
+              <a:rPr lang="en-US" sz="1100" b="1" dirty="0">
+                <a:solidFill>
+                  <a:srgbClr val="5E6F66"/>
+                </a:solidFill>
+                <a:latin typeface="Microsoft JhengHei" pitchFamily="34" charset="0"/>
+                <a:ea typeface="Microsoft JhengHei" pitchFamily="34" charset="-122"/>
+                <a:cs typeface="Microsoft JhengHei" pitchFamily="34" charset="-120"/>
+              </a:rPr>
+              <a:t>評估集</a:t>
+            </a:r>
+            <a:endParaRPr lang="en-US" sz="1100" dirty="0"/>
+          </a:p>
+        </p:txBody>
+      </p:sp>
+      <p:sp>
+        <p:nvSpPr>
+          <p:cNvPr id="10" name="Text 8"/>
+          <p:cNvSpPr txBox="1"/>
+          <p:nvPr/>
+        </p:nvSpPr>
+        <p:spPr>
+          <a:xfrm>
+            <a:off x="868680" y="3657600"/>
+            <a:ext cx="3035808" cy="640080"/>
+          </a:xfrm>
+          <a:prstGeom prst="rect">
+            <a:avLst/>
+          </a:prstGeom>
+          <a:noFill/>
+          <a:ln/>
+        </p:spPr>
+        <p:txBody>
+          <a:bodyPr wrap="square" lIns="0" tIns="0" rIns="0" bIns="0" rtlCol="0" anchor="ctr"/>
+          <a:lstStyle/>
+          <a:p>
+            <a:pPr indent="0" marL="0">
+              <a:buNone/>
+            </a:pPr>
+            <a:r>
+              <a:rPr lang="en-US" sz="1300" dirty="0">
+                <a:solidFill>
+                  <a:srgbClr val="1A2620"/>
+                </a:solidFill>
+                <a:latin typeface="Microsoft JhengHei" pitchFamily="34" charset="0"/>
+                <a:ea typeface="Microsoft JhengHei" pitchFamily="34" charset="-122"/>
+                <a:cs typeface="Microsoft JhengHei" pitchFamily="34" charset="-120"/>
+              </a:rPr>
+              <a:t>valid 438 張</a:t>
+            </a:r>
+            <a:endParaRPr lang="en-US" sz="1300" dirty="0"/>
+          </a:p>
+          <a:p>
+            <a:pPr indent="0" marL="0">
+              <a:buNone/>
+            </a:pPr>
+            <a:r>
+              <a:rPr lang="en-US" sz="1300" dirty="0">
+                <a:solidFill>
+                  <a:srgbClr val="1A2620"/>
+                </a:solidFill>
+                <a:latin typeface="Microsoft JhengHei" pitchFamily="34" charset="0"/>
+                <a:ea typeface="Microsoft JhengHei" pitchFamily="34" charset="-122"/>
+                <a:cs typeface="Microsoft JhengHei" pitchFamily="34" charset="-120"/>
+              </a:rPr>
+              <a:t>P_SI 一類佔框數 68.8%</a:t>
+            </a:r>
+            <a:endParaRPr lang="en-US" sz="1300" dirty="0"/>
+          </a:p>
+        </p:txBody>
+      </p:sp>
+      <p:sp>
+        <p:nvSpPr>
+          <p:cNvPr id="11" name="Text 9"/>
+          <p:cNvSpPr txBox="1"/>
+          <p:nvPr/>
+        </p:nvSpPr>
+        <p:spPr>
+          <a:xfrm>
+            <a:off x="868680" y="4370832"/>
+            <a:ext cx="3035808" cy="274320"/>
+          </a:xfrm>
+          <a:prstGeom prst="rect">
+            <a:avLst/>
+          </a:prstGeom>
+          <a:noFill/>
+          <a:ln/>
+        </p:spPr>
+        <p:txBody>
+          <a:bodyPr wrap="square" lIns="0" tIns="0" rIns="0" bIns="0" rtlCol="0" anchor="ctr"/>
+          <a:lstStyle/>
+          <a:p>
+            <a:pPr indent="0" marL="0">
+              <a:buNone/>
+            </a:pPr>
+            <a:r>
+              <a:rPr lang="en-US" sz="1100" b="1" dirty="0">
+                <a:solidFill>
+                  <a:srgbClr val="5E6F66"/>
+                </a:solidFill>
+                <a:latin typeface="Microsoft JhengHei" pitchFamily="34" charset="0"/>
+                <a:ea typeface="Microsoft JhengHei" pitchFamily="34" charset="-122"/>
+                <a:cs typeface="Microsoft JhengHei" pitchFamily="34" charset="-120"/>
+              </a:rPr>
+              <a:t>權重</a:t>
+            </a:r>
+            <a:endParaRPr lang="en-US" sz="1100" dirty="0"/>
+          </a:p>
+        </p:txBody>
+      </p:sp>
+      <p:sp>
+        <p:nvSpPr>
+          <p:cNvPr id="12" name="Text 10"/>
+          <p:cNvSpPr txBox="1"/>
+          <p:nvPr/>
+        </p:nvSpPr>
+        <p:spPr>
+          <a:xfrm>
+            <a:off x="868680" y="4645152"/>
+            <a:ext cx="3035808" cy="640080"/>
+          </a:xfrm>
+          <a:prstGeom prst="rect">
+            <a:avLst/>
+          </a:prstGeom>
+          <a:noFill/>
+          <a:ln/>
+        </p:spPr>
+        <p:txBody>
+          <a:bodyPr wrap="square" lIns="0" tIns="0" rIns="0" bIns="0" rtlCol="0" anchor="ctr"/>
+          <a:lstStyle/>
+          <a:p>
+            <a:pPr indent="0" marL="0">
+              <a:buNone/>
+            </a:pPr>
+            <a:r>
+              <a:rPr lang="en-US" sz="1300" dirty="0">
+                <a:solidFill>
+                  <a:srgbClr val="1A2620"/>
+                </a:solidFill>
+                <a:latin typeface="Microsoft JhengHei" pitchFamily="34" charset="0"/>
+                <a:ea typeface="Microsoft JhengHei" pitchFamily="34" charset="-122"/>
+                <a:cs typeface="Microsoft JhengHei" pitchFamily="34" charset="-120"/>
+              </a:rPr>
+              <a:t>最後一輪</a:t>
+            </a:r>
+            <a:endParaRPr lang="en-US" sz="1300" dirty="0"/>
+          </a:p>
+          <a:p>
+            <a:pPr indent="0" marL="0">
+              <a:buNone/>
+            </a:pPr>
+            <a:r>
+              <a:rPr lang="en-US" sz="1300" dirty="0">
+                <a:solidFill>
+                  <a:srgbClr val="1A2620"/>
+                </a:solidFill>
+                <a:latin typeface="Microsoft JhengHei" pitchFamily="34" charset="0"/>
+                <a:ea typeface="Microsoft JhengHei" pitchFamily="34" charset="-122"/>
+                <a:cs typeface="Microsoft JhengHei" pitchFamily="34" charset="-120"/>
+              </a:rPr>
+              <a:t>（原報告標成「最優」）</a:t>
+            </a:r>
+            <a:endParaRPr lang="en-US" sz="1300" dirty="0"/>
+          </a:p>
+        </p:txBody>
+      </p:sp>
+      <p:sp>
+        <p:nvSpPr>
+          <p:cNvPr id="13" name="Shape 11"/>
+          <p:cNvSpPr/>
+          <p:nvPr/>
+        </p:nvSpPr>
+        <p:spPr>
+          <a:xfrm>
+            <a:off x="4517136" y="1664208"/>
+            <a:ext cx="3493008" cy="3703320"/>
+          </a:xfrm>
+          <a:prstGeom prst="roundRect">
+            <a:avLst>
+              <a:gd name="adj" fmla="val 2618"/>
+            </a:avLst>
+          </a:prstGeom>
+          <a:solidFill>
+            <a:srgbClr val="F6F9F7"/>
+          </a:solidFill>
+          <a:ln w="12700">
+            <a:solidFill>
+              <a:srgbClr val="F6F9F7"/>
+            </a:solidFill>
+            <a:prstDash val="solid"/>
+          </a:ln>
+        </p:spPr>
+      </p:sp>
+      <p:sp>
+        <p:nvSpPr>
+          <p:cNvPr id="14" name="Shape 12"/>
+          <p:cNvSpPr/>
+          <p:nvPr/>
+        </p:nvSpPr>
+        <p:spPr>
+          <a:xfrm>
+            <a:off x="4517136" y="1664208"/>
+            <a:ext cx="3493008" cy="566928"/>
+          </a:xfrm>
+          <a:prstGeom prst="roundRect">
+            <a:avLst>
+              <a:gd name="adj" fmla="val 16129"/>
+            </a:avLst>
+          </a:prstGeom>
+          <a:solidFill>
+            <a:srgbClr val="5E8F73"/>
+          </a:solidFill>
+          <a:ln/>
+        </p:spPr>
+      </p:sp>
+      <p:sp>
+        <p:nvSpPr>
+          <p:cNvPr id="15" name="Text 13"/>
+          <p:cNvSpPr txBox="1"/>
+          <p:nvPr/>
+        </p:nvSpPr>
+        <p:spPr>
+          <a:xfrm>
+            <a:off x="4700016" y="1664208"/>
+            <a:ext cx="3127248" cy="566928"/>
+          </a:xfrm>
+          <a:prstGeom prst="rect">
+            <a:avLst/>
+          </a:prstGeom>
+          <a:noFill/>
+          <a:ln/>
+        </p:spPr>
+        <p:txBody>
+          <a:bodyPr wrap="square" lIns="0" tIns="0" rIns="0" bIns="0" rtlCol="0" anchor="ctr"/>
+          <a:lstStyle/>
+          <a:p>
+            <a:pPr indent="0" marL="0">
+              <a:buNone/>
+            </a:pPr>
+            <a:r>
+              <a:rPr lang="en-US" sz="1400" b="1" dirty="0">
+                <a:solidFill>
+                  <a:srgbClr val="FFFFFF"/>
+                </a:solidFill>
+                <a:latin typeface="Microsoft JhengHei" pitchFamily="34" charset="0"/>
+                <a:ea typeface="Microsoft JhengHei" pitchFamily="34" charset="-122"/>
+                <a:cs typeface="Microsoft JhengHei" pitchFamily="34" charset="-120"/>
+              </a:rPr>
+              <a:t>8 類（v5・v5r）</a:t>
+            </a:r>
+            <a:endParaRPr lang="en-US" sz="1400" dirty="0"/>
+          </a:p>
+        </p:txBody>
+      </p:sp>
+      <p:sp>
+        <p:nvSpPr>
+          <p:cNvPr id="16" name="Text 14"/>
+          <p:cNvSpPr txBox="1"/>
+          <p:nvPr/>
+        </p:nvSpPr>
+        <p:spPr>
+          <a:xfrm>
+            <a:off x="4745736" y="2395728"/>
+            <a:ext cx="3035808" cy="274320"/>
+          </a:xfrm>
+          <a:prstGeom prst="rect">
+            <a:avLst/>
+          </a:prstGeom>
+          <a:noFill/>
+          <a:ln/>
+        </p:spPr>
+        <p:txBody>
+          <a:bodyPr wrap="square" lIns="0" tIns="0" rIns="0" bIns="0" rtlCol="0" anchor="ctr"/>
+          <a:lstStyle/>
+          <a:p>
+            <a:pPr indent="0" marL="0">
+              <a:buNone/>
+            </a:pPr>
+            <a:r>
+              <a:rPr lang="en-US" sz="1100" b="1" dirty="0">
+                <a:solidFill>
+                  <a:srgbClr val="5E6F66"/>
+                </a:solidFill>
+                <a:latin typeface="Microsoft JhengHei" pitchFamily="34" charset="0"/>
+                <a:ea typeface="Microsoft JhengHei" pitchFamily="34" charset="-122"/>
+                <a:cs typeface="Microsoft JhengHei" pitchFamily="34" charset="-120"/>
+              </a:rPr>
+              <a:t>類別</a:t>
+            </a:r>
+            <a:endParaRPr lang="en-US" sz="1100" dirty="0"/>
+          </a:p>
+        </p:txBody>
+      </p:sp>
+      <p:sp>
+        <p:nvSpPr>
+          <p:cNvPr id="17" name="Text 15"/>
+          <p:cNvSpPr txBox="1"/>
+          <p:nvPr/>
+        </p:nvSpPr>
+        <p:spPr>
+          <a:xfrm>
+            <a:off x="4745736" y="2670048"/>
+            <a:ext cx="3035808" cy="640080"/>
+          </a:xfrm>
+          <a:prstGeom prst="rect">
+            <a:avLst/>
+          </a:prstGeom>
+          <a:noFill/>
+          <a:ln/>
+        </p:spPr>
+        <p:txBody>
+          <a:bodyPr wrap="square" lIns="0" tIns="0" rIns="0" bIns="0" rtlCol="0" anchor="ctr"/>
+          <a:lstStyle/>
+          <a:p>
+            <a:pPr indent="0" marL="0">
+              <a:buNone/>
+            </a:pPr>
+            <a:r>
+              <a:rPr lang="en-US" sz="1300" dirty="0">
+                <a:solidFill>
+                  <a:srgbClr val="1A2620"/>
+                </a:solidFill>
+                <a:latin typeface="Microsoft JhengHei" pitchFamily="34" charset="0"/>
+                <a:ea typeface="Microsoft JhengHei" pitchFamily="34" charset="-122"/>
+                <a:cs typeface="Microsoft JhengHei" pitchFamily="34" charset="-120"/>
+              </a:rPr>
+              <a:t>8 類</a:t>
+            </a:r>
+            <a:endParaRPr lang="en-US" sz="1300" dirty="0"/>
+          </a:p>
+          <a:p>
+            <a:pPr indent="0" marL="0">
+              <a:buNone/>
+            </a:pPr>
+            <a:r>
+              <a:rPr lang="en-US" sz="1300" dirty="0">
+                <a:solidFill>
+                  <a:srgbClr val="1A2620"/>
+                </a:solidFill>
+                <a:latin typeface="Microsoft JhengHei" pitchFamily="34" charset="0"/>
+                <a:ea typeface="Microsoft JhengHei" pitchFamily="34" charset="-122"/>
+                <a:cs typeface="Microsoft JhengHei" pitchFamily="34" charset="-120"/>
+              </a:rPr>
+              <a:t>沒有 Thrips_Damage</a:t>
+            </a:r>
+            <a:endParaRPr lang="en-US" sz="1300" dirty="0"/>
+          </a:p>
+        </p:txBody>
+      </p:sp>
+      <p:sp>
+        <p:nvSpPr>
+          <p:cNvPr id="18" name="Text 16"/>
+          <p:cNvSpPr txBox="1"/>
+          <p:nvPr/>
+        </p:nvSpPr>
+        <p:spPr>
+          <a:xfrm>
+            <a:off x="4745736" y="3383280"/>
+            <a:ext cx="3035808" cy="274320"/>
+          </a:xfrm>
+          <a:prstGeom prst="rect">
+            <a:avLst/>
+          </a:prstGeom>
+          <a:noFill/>
+          <a:ln/>
+        </p:spPr>
+        <p:txBody>
+          <a:bodyPr wrap="square" lIns="0" tIns="0" rIns="0" bIns="0" rtlCol="0" anchor="ctr"/>
+          <a:lstStyle/>
+          <a:p>
+            <a:pPr indent="0" marL="0">
+              <a:buNone/>
+            </a:pPr>
+            <a:r>
+              <a:rPr lang="en-US" sz="1100" b="1" dirty="0">
+                <a:solidFill>
+                  <a:srgbClr val="5E6F66"/>
+                </a:solidFill>
+                <a:latin typeface="Microsoft JhengHei" pitchFamily="34" charset="0"/>
+                <a:ea typeface="Microsoft JhengHei" pitchFamily="34" charset="-122"/>
+                <a:cs typeface="Microsoft JhengHei" pitchFamily="34" charset="-120"/>
+              </a:rPr>
+              <a:t>評估集</a:t>
+            </a:r>
+            <a:endParaRPr lang="en-US" sz="1100" dirty="0"/>
+          </a:p>
+        </p:txBody>
+      </p:sp>
+      <p:sp>
+        <p:nvSpPr>
+          <p:cNvPr id="19" name="Text 17"/>
+          <p:cNvSpPr txBox="1"/>
+          <p:nvPr/>
+        </p:nvSpPr>
+        <p:spPr>
+          <a:xfrm>
+            <a:off x="4745736" y="3657600"/>
+            <a:ext cx="3035808" cy="640080"/>
+          </a:xfrm>
+          <a:prstGeom prst="rect">
+            <a:avLst/>
+          </a:prstGeom>
+          <a:noFill/>
+          <a:ln/>
+        </p:spPr>
+        <p:txBody>
+          <a:bodyPr wrap="square" lIns="0" tIns="0" rIns="0" bIns="0" rtlCol="0" anchor="ctr"/>
+          <a:lstStyle/>
+          <a:p>
+            <a:pPr indent="0" marL="0">
+              <a:buNone/>
+            </a:pPr>
+            <a:r>
+              <a:rPr lang="en-US" sz="1300" dirty="0">
+                <a:solidFill>
+                  <a:srgbClr val="1A2620"/>
+                </a:solidFill>
+                <a:latin typeface="Microsoft JhengHei" pitchFamily="34" charset="0"/>
+                <a:ea typeface="Microsoft JhengHei" pitchFamily="34" charset="-122"/>
+                <a:cs typeface="Microsoft JhengHei" pitchFamily="34" charset="-120"/>
+              </a:rPr>
+              <a:t>valid 438 張</a:t>
+            </a:r>
+            <a:endParaRPr lang="en-US" sz="1300" dirty="0"/>
+          </a:p>
+          <a:p>
+            <a:pPr indent="0" marL="0">
+              <a:buNone/>
+            </a:pPr>
+            <a:r>
+              <a:rPr lang="en-US" sz="1300" dirty="0">
+                <a:solidFill>
+                  <a:srgbClr val="1A2620"/>
+                </a:solidFill>
+                <a:latin typeface="Microsoft JhengHei" pitchFamily="34" charset="0"/>
+                <a:ea typeface="Microsoft JhengHei" pitchFamily="34" charset="-122"/>
+                <a:cs typeface="Microsoft JhengHei" pitchFamily="34" charset="-120"/>
+              </a:rPr>
+              <a:t>v5r 有 13.4% 跨 split 近重複</a:t>
+            </a:r>
+            <a:endParaRPr lang="en-US" sz="1300" dirty="0"/>
+          </a:p>
+        </p:txBody>
+      </p:sp>
+      <p:sp>
+        <p:nvSpPr>
+          <p:cNvPr id="20" name="Text 18"/>
+          <p:cNvSpPr txBox="1"/>
+          <p:nvPr/>
+        </p:nvSpPr>
+        <p:spPr>
+          <a:xfrm>
+            <a:off x="4745736" y="4370832"/>
+            <a:ext cx="3035808" cy="274320"/>
+          </a:xfrm>
+          <a:prstGeom prst="rect">
+            <a:avLst/>
+          </a:prstGeom>
+          <a:noFill/>
+          <a:ln/>
+        </p:spPr>
+        <p:txBody>
+          <a:bodyPr wrap="square" lIns="0" tIns="0" rIns="0" bIns="0" rtlCol="0" anchor="ctr"/>
+          <a:lstStyle/>
+          <a:p>
+            <a:pPr indent="0" marL="0">
+              <a:buNone/>
+            </a:pPr>
+            <a:r>
+              <a:rPr lang="en-US" sz="1100" b="1" dirty="0">
+                <a:solidFill>
+                  <a:srgbClr val="5E6F66"/>
+                </a:solidFill>
+                <a:latin typeface="Microsoft JhengHei" pitchFamily="34" charset="0"/>
+                <a:ea typeface="Microsoft JhengHei" pitchFamily="34" charset="-122"/>
+                <a:cs typeface="Microsoft JhengHei" pitchFamily="34" charset="-120"/>
+              </a:rPr>
+              <a:t>權重</a:t>
+            </a:r>
+            <a:endParaRPr lang="en-US" sz="1100" dirty="0"/>
+          </a:p>
+        </p:txBody>
+      </p:sp>
+      <p:sp>
+        <p:nvSpPr>
+          <p:cNvPr id="21" name="Text 19"/>
+          <p:cNvSpPr txBox="1"/>
+          <p:nvPr/>
+        </p:nvSpPr>
+        <p:spPr>
+          <a:xfrm>
+            <a:off x="4745736" y="4645152"/>
+            <a:ext cx="3035808" cy="640080"/>
+          </a:xfrm>
+          <a:prstGeom prst="rect">
+            <a:avLst/>
+          </a:prstGeom>
+          <a:noFill/>
+          <a:ln/>
+        </p:spPr>
+        <p:txBody>
+          <a:bodyPr wrap="square" lIns="0" tIns="0" rIns="0" bIns="0" rtlCol="0" anchor="ctr"/>
+          <a:lstStyle/>
+          <a:p>
+            <a:pPr indent="0" marL="0">
+              <a:buNone/>
+            </a:pPr>
+            <a:r>
+              <a:rPr lang="en-US" sz="1300" dirty="0">
+                <a:solidFill>
+                  <a:srgbClr val="1A2620"/>
+                </a:solidFill>
+                <a:latin typeface="Microsoft JhengHei" pitchFamily="34" charset="0"/>
+                <a:ea typeface="Microsoft JhengHei" pitchFamily="34" charset="-122"/>
+                <a:cs typeface="Microsoft JhengHei" pitchFamily="34" charset="-120"/>
+              </a:rPr>
+              <a:t>best.pt</a:t>
+            </a:r>
+            <a:endParaRPr lang="en-US" sz="1300" dirty="0"/>
+          </a:p>
+        </p:txBody>
+      </p:sp>
+      <p:sp>
+        <p:nvSpPr>
+          <p:cNvPr id="22" name="Shape 20"/>
+          <p:cNvSpPr/>
+          <p:nvPr/>
+        </p:nvSpPr>
+        <p:spPr>
+          <a:xfrm>
+            <a:off x="8394192" y="1664208"/>
+            <a:ext cx="3493008" cy="3703320"/>
+          </a:xfrm>
+          <a:prstGeom prst="roundRect">
+            <a:avLst>
+              <a:gd name="adj" fmla="val 2618"/>
+            </a:avLst>
+          </a:prstGeom>
+          <a:solidFill>
+            <a:srgbClr val="EAF2EC"/>
+          </a:solidFill>
+          <a:ln w="12700">
+            <a:solidFill>
+              <a:srgbClr val="EAF2EC"/>
+            </a:solidFill>
+            <a:prstDash val="solid"/>
+          </a:ln>
+        </p:spPr>
+      </p:sp>
+      <p:sp>
+        <p:nvSpPr>
+          <p:cNvPr id="23" name="Shape 21"/>
+          <p:cNvSpPr/>
+          <p:nvPr/>
+        </p:nvSpPr>
+        <p:spPr>
+          <a:xfrm>
+            <a:off x="8394192" y="1664208"/>
+            <a:ext cx="3493008" cy="566928"/>
+          </a:xfrm>
+          <a:prstGeom prst="roundRect">
+            <a:avLst>
+              <a:gd name="adj" fmla="val 16129"/>
+            </a:avLst>
+          </a:prstGeom>
+          <a:solidFill>
+            <a:srgbClr val="2C5F45"/>
+          </a:solidFill>
+          <a:ln/>
+        </p:spPr>
+      </p:sp>
+      <p:sp>
+        <p:nvSpPr>
+          <p:cNvPr id="24" name="Text 22"/>
+          <p:cNvSpPr txBox="1"/>
+          <p:nvPr/>
+        </p:nvSpPr>
+        <p:spPr>
+          <a:xfrm>
+            <a:off x="8577072" y="1664208"/>
+            <a:ext cx="3127248" cy="566928"/>
+          </a:xfrm>
+          <a:prstGeom prst="rect">
+            <a:avLst/>
+          </a:prstGeom>
+          <a:noFill/>
+          <a:ln/>
+        </p:spPr>
+        <p:txBody>
+          <a:bodyPr wrap="square" lIns="0" tIns="0" rIns="0" bIns="0" rtlCol="0" anchor="ctr"/>
+          <a:lstStyle/>
+          <a:p>
+            <a:pPr indent="0" marL="0">
+              <a:buNone/>
+            </a:pPr>
+            <a:r>
+              <a:rPr lang="en-US" sz="1400" b="1" dirty="0">
+                <a:solidFill>
+                  <a:srgbClr val="FFFFFF"/>
+                </a:solidFill>
+                <a:latin typeface="Microsoft JhengHei" pitchFamily="34" charset="0"/>
+                <a:ea typeface="Microsoft JhengHei" pitchFamily="34" charset="-122"/>
+                <a:cs typeface="Microsoft JhengHei" pitchFamily="34" charset="-120"/>
+              </a:rPr>
+              <a:t>9 類（v5.5・v5.6，現行）</a:t>
+            </a:r>
+            <a:endParaRPr lang="en-US" sz="1400" dirty="0"/>
+          </a:p>
+        </p:txBody>
+      </p:sp>
+      <p:sp>
+        <p:nvSpPr>
+          <p:cNvPr id="25" name="Text 23"/>
+          <p:cNvSpPr txBox="1"/>
+          <p:nvPr/>
+        </p:nvSpPr>
+        <p:spPr>
+          <a:xfrm>
+            <a:off x="8622792" y="2395728"/>
+            <a:ext cx="3035808" cy="274320"/>
+          </a:xfrm>
+          <a:prstGeom prst="rect">
+            <a:avLst/>
+          </a:prstGeom>
+          <a:noFill/>
+          <a:ln/>
+        </p:spPr>
+        <p:txBody>
+          <a:bodyPr wrap="square" lIns="0" tIns="0" rIns="0" bIns="0" rtlCol="0" anchor="ctr"/>
+          <a:lstStyle/>
+          <a:p>
+            <a:pPr indent="0" marL="0">
+              <a:buNone/>
+            </a:pPr>
+            <a:r>
+              <a:rPr lang="en-US" sz="1100" b="1" dirty="0">
+                <a:solidFill>
+                  <a:srgbClr val="5E6F66"/>
+                </a:solidFill>
+                <a:latin typeface="Microsoft JhengHei" pitchFamily="34" charset="0"/>
+                <a:ea typeface="Microsoft JhengHei" pitchFamily="34" charset="-122"/>
+                <a:cs typeface="Microsoft JhengHei" pitchFamily="34" charset="-120"/>
+              </a:rPr>
+              <a:t>類別</a:t>
+            </a:r>
+            <a:endParaRPr lang="en-US" sz="1100" dirty="0"/>
+          </a:p>
+        </p:txBody>
+      </p:sp>
+      <p:sp>
+        <p:nvSpPr>
+          <p:cNvPr id="26" name="Text 24"/>
+          <p:cNvSpPr txBox="1"/>
+          <p:nvPr/>
+        </p:nvSpPr>
+        <p:spPr>
+          <a:xfrm>
+            <a:off x="8622792" y="2670048"/>
+            <a:ext cx="3035808" cy="640080"/>
+          </a:xfrm>
+          <a:prstGeom prst="rect">
+            <a:avLst/>
+          </a:prstGeom>
+          <a:noFill/>
+          <a:ln/>
+        </p:spPr>
+        <p:txBody>
+          <a:bodyPr wrap="square" lIns="0" tIns="0" rIns="0" bIns="0" rtlCol="0" anchor="ctr"/>
+          <a:lstStyle/>
+          <a:p>
+            <a:pPr indent="0" marL="0">
+              <a:buNone/>
+            </a:pPr>
+            <a:r>
+              <a:rPr lang="en-US" sz="1300" dirty="0">
+                <a:solidFill>
+                  <a:srgbClr val="1A2620"/>
+                </a:solidFill>
+                <a:latin typeface="Microsoft JhengHei" pitchFamily="34" charset="0"/>
+                <a:ea typeface="Microsoft JhengHei" pitchFamily="34" charset="-122"/>
+                <a:cs typeface="Microsoft JhengHei" pitchFamily="34" charset="-120"/>
+              </a:rPr>
+              <a:t>9 類</a:t>
+            </a:r>
+            <a:endParaRPr lang="en-US" sz="1300" dirty="0"/>
+          </a:p>
+          <a:p>
+            <a:pPr indent="0" marL="0">
+              <a:buNone/>
+            </a:pPr>
+            <a:r>
+              <a:rPr lang="en-US" sz="1300" dirty="0">
+                <a:solidFill>
+                  <a:srgbClr val="1A2620"/>
+                </a:solidFill>
+                <a:latin typeface="Microsoft JhengHei" pitchFamily="34" charset="0"/>
+                <a:ea typeface="Microsoft JhengHei" pitchFamily="34" charset="-122"/>
+                <a:cs typeface="Microsoft JhengHei" pitchFamily="34" charset="-120"/>
+              </a:rPr>
+              <a:t>定義已固定</a:t>
+            </a:r>
+            <a:endParaRPr lang="en-US" sz="1300" dirty="0"/>
+          </a:p>
+        </p:txBody>
+      </p:sp>
+      <p:sp>
+        <p:nvSpPr>
+          <p:cNvPr id="27" name="Text 25"/>
+          <p:cNvSpPr txBox="1"/>
+          <p:nvPr/>
+        </p:nvSpPr>
+        <p:spPr>
+          <a:xfrm>
+            <a:off x="8622792" y="3383280"/>
+            <a:ext cx="3035808" cy="274320"/>
+          </a:xfrm>
+          <a:prstGeom prst="rect">
+            <a:avLst/>
+          </a:prstGeom>
+          <a:noFill/>
+          <a:ln/>
+        </p:spPr>
+        <p:txBody>
+          <a:bodyPr wrap="square" lIns="0" tIns="0" rIns="0" bIns="0" rtlCol="0" anchor="ctr"/>
+          <a:lstStyle/>
+          <a:p>
+            <a:pPr indent="0" marL="0">
+              <a:buNone/>
+            </a:pPr>
+            <a:r>
+              <a:rPr lang="en-US" sz="1100" b="1" dirty="0">
+                <a:solidFill>
+                  <a:srgbClr val="5E6F66"/>
+                </a:solidFill>
+                <a:latin typeface="Microsoft JhengHei" pitchFamily="34" charset="0"/>
+                <a:ea typeface="Microsoft JhengHei" pitchFamily="34" charset="-122"/>
+                <a:cs typeface="Microsoft JhengHei" pitchFamily="34" charset="-120"/>
+              </a:rPr>
+              <a:t>評估集</a:t>
+            </a:r>
+            <a:endParaRPr lang="en-US" sz="1100" dirty="0"/>
+          </a:p>
+        </p:txBody>
+      </p:sp>
+      <p:sp>
+        <p:nvSpPr>
+          <p:cNvPr id="28" name="Text 26"/>
+          <p:cNvSpPr txBox="1"/>
+          <p:nvPr/>
+        </p:nvSpPr>
+        <p:spPr>
+          <a:xfrm>
+            <a:off x="8622792" y="3657600"/>
+            <a:ext cx="3035808" cy="640080"/>
+          </a:xfrm>
+          <a:prstGeom prst="rect">
+            <a:avLst/>
+          </a:prstGeom>
+          <a:noFill/>
+          <a:ln/>
+        </p:spPr>
+        <p:txBody>
+          <a:bodyPr wrap="square" lIns="0" tIns="0" rIns="0" bIns="0" rtlCol="0" anchor="ctr"/>
+          <a:lstStyle/>
+          <a:p>
+            <a:pPr indent="0" marL="0">
+              <a:buNone/>
+            </a:pPr>
+            <a:r>
+              <a:rPr lang="en-US" sz="1300" dirty="0">
+                <a:solidFill>
+                  <a:srgbClr val="1A2620"/>
+                </a:solidFill>
+                <a:latin typeface="Microsoft JhengHei" pitchFamily="34" charset="0"/>
+                <a:ea typeface="Microsoft JhengHei" pitchFamily="34" charset="-122"/>
+                <a:cs typeface="Microsoft JhengHei" pitchFamily="34" charset="-120"/>
+              </a:rPr>
+              <a:t>valid 401 ＋ test 401</a:t>
+            </a:r>
+            <a:endParaRPr lang="en-US" sz="1300" dirty="0"/>
+          </a:p>
+          <a:p>
+            <a:pPr indent="0" marL="0">
+              <a:buNone/>
+            </a:pPr>
+            <a:r>
+              <a:rPr lang="en-US" sz="1300" dirty="0">
+                <a:solidFill>
+                  <a:srgbClr val="1A2620"/>
+                </a:solidFill>
+                <a:latin typeface="Microsoft JhengHei" pitchFamily="34" charset="0"/>
+                <a:ea typeface="Microsoft JhengHei" pitchFamily="34" charset="-122"/>
+                <a:cs typeface="Microsoft JhengHei" pitchFamily="34" charset="-120"/>
+              </a:rPr>
+              <a:t>零洩漏、±2SE ≤ 0.10</a:t>
+            </a:r>
+            <a:endParaRPr lang="en-US" sz="1300" dirty="0"/>
+          </a:p>
+        </p:txBody>
+      </p:sp>
+      <p:sp>
+        <p:nvSpPr>
+          <p:cNvPr id="29" name="Text 27"/>
+          <p:cNvSpPr txBox="1"/>
+          <p:nvPr/>
+        </p:nvSpPr>
+        <p:spPr>
+          <a:xfrm>
+            <a:off x="8622792" y="4370832"/>
+            <a:ext cx="3035808" cy="274320"/>
+          </a:xfrm>
+          <a:prstGeom prst="rect">
+            <a:avLst/>
+          </a:prstGeom>
+          <a:noFill/>
+          <a:ln/>
+        </p:spPr>
+        <p:txBody>
+          <a:bodyPr wrap="square" lIns="0" tIns="0" rIns="0" bIns="0" rtlCol="0" anchor="ctr"/>
+          <a:lstStyle/>
+          <a:p>
+            <a:pPr indent="0" marL="0">
+              <a:buNone/>
+            </a:pPr>
+            <a:r>
+              <a:rPr lang="en-US" sz="1100" b="1" dirty="0">
+                <a:solidFill>
+                  <a:srgbClr val="5E6F66"/>
+                </a:solidFill>
+                <a:latin typeface="Microsoft JhengHei" pitchFamily="34" charset="0"/>
+                <a:ea typeface="Microsoft JhengHei" pitchFamily="34" charset="-122"/>
+                <a:cs typeface="Microsoft JhengHei" pitchFamily="34" charset="-120"/>
+              </a:rPr>
+              <a:t>權重</a:t>
+            </a:r>
+            <a:endParaRPr lang="en-US" sz="1100" dirty="0"/>
+          </a:p>
+        </p:txBody>
+      </p:sp>
+      <p:sp>
+        <p:nvSpPr>
+          <p:cNvPr id="30" name="Text 28"/>
+          <p:cNvSpPr txBox="1"/>
+          <p:nvPr/>
+        </p:nvSpPr>
+        <p:spPr>
+          <a:xfrm>
+            <a:off x="8622792" y="4645152"/>
+            <a:ext cx="3035808" cy="640080"/>
+          </a:xfrm>
+          <a:prstGeom prst="rect">
+            <a:avLst/>
+          </a:prstGeom>
+          <a:noFill/>
+          <a:ln/>
+        </p:spPr>
+        <p:txBody>
+          <a:bodyPr wrap="square" lIns="0" tIns="0" rIns="0" bIns="0" rtlCol="0" anchor="ctr"/>
+          <a:lstStyle/>
+          <a:p>
+            <a:pPr indent="0" marL="0">
+              <a:buNone/>
+            </a:pPr>
+            <a:r>
+              <a:rPr lang="en-US" sz="1300" dirty="0">
+                <a:solidFill>
+                  <a:srgbClr val="1A2620"/>
+                </a:solidFill>
+                <a:latin typeface="Microsoft JhengHei" pitchFamily="34" charset="0"/>
+                <a:ea typeface="Microsoft JhengHei" pitchFamily="34" charset="-122"/>
+                <a:cs typeface="Microsoft JhengHei" pitchFamily="34" charset="-120"/>
+              </a:rPr>
+              <a:t>last.pt（無選擇偏誤）</a:t>
+            </a:r>
+            <a:endParaRPr lang="en-US" sz="1300" dirty="0"/>
+          </a:p>
+        </p:txBody>
+      </p:sp>
+      <p:sp>
+        <p:nvSpPr>
+          <p:cNvPr id="31" name="Text 29"/>
+          <p:cNvSpPr txBox="1"/>
+          <p:nvPr/>
+        </p:nvSpPr>
+        <p:spPr>
+          <a:xfrm>
+            <a:off x="640080" y="5532120"/>
+            <a:ext cx="10911535" cy="411480"/>
+          </a:xfrm>
+          <a:prstGeom prst="rect">
+            <a:avLst/>
+          </a:prstGeom>
+          <a:noFill/>
+          <a:ln/>
+        </p:spPr>
+        <p:txBody>
+          <a:bodyPr wrap="square" lIns="0" tIns="0" rIns="0" bIns="0" rtlCol="0" anchor="ctr"/>
+          <a:lstStyle/>
+          <a:p>
+            <a:pPr indent="0" marL="0">
+              <a:buNone/>
+            </a:pPr>
+            <a:r>
+              <a:rPr lang="en-US" sz="1500" b="1" dirty="0">
+                <a:solidFill>
+                  <a:srgbClr val="E8963C"/>
+                </a:solidFill>
+                <a:latin typeface="Microsoft JhengHei" pitchFamily="34" charset="0"/>
+                <a:ea typeface="Microsoft JhengHei" pitchFamily="34" charset="-122"/>
+                <a:cs typeface="Microsoft JhengHei" pitchFamily="34" charset="-120"/>
+              </a:rPr>
+              <a:t>量尺換過三次，刻度不能互換 —— 唯一能直接相減的是 v11.5 對 v12s。</a:t>
+            </a:r>
+            <a:endParaRPr lang="en-US" sz="1500" dirty="0"/>
+          </a:p>
+        </p:txBody>
+      </p:sp>
+    </p:spTree>
+  </p:cSld>
+  <p:clrMapOvr>
+    <a:masterClrMapping/>
+  </p:clrMapOvr>
+</p:sld>
+</file>
+
+<file path=ppt/slides/slide14.xml><?xml version="1.0" encoding="utf-8"?>
+<p:sld xmlns:a="http://schemas.openxmlformats.org/drawingml/2006/main" xmlns:r="http://schemas.openxmlformats.org/officeDocument/2006/relationships" xmlns:p="http://schemas.openxmlformats.org/presentationml/2006/main">
+  <p:cSld name="Slide 14">
+    <p:bg>
+      <p:bgPr>
+        <a:solidFill>
+          <a:srgbClr val="FFFFFF"/>
+        </a:solidFill>
+      </p:bgPr>
+    </p:bg>
+    <p:spTree>
+      <p:nvGrpSpPr>
+        <p:cNvPr id="1" name=""/>
+        <p:cNvGrpSpPr/>
+        <p:nvPr/>
+      </p:nvGrpSpPr>
+      <p:grpSpPr>
+        <a:xfrm>
+          <a:off x="0" y="0"/>
+          <a:ext cx="0" cy="0"/>
+          <a:chOff x="0" y="0"/>
+          <a:chExt cx="0" cy="0"/>
+        </a:xfrm>
+      </p:grpSpPr>
+      <p:sp>
+        <p:nvSpPr>
+          <p:cNvPr id="2" name="Text 0"/>
+          <p:cNvSpPr txBox="1"/>
+          <p:nvPr/>
+        </p:nvSpPr>
+        <p:spPr>
+          <a:xfrm>
+            <a:off x="640080" y="411480"/>
+            <a:ext cx="10911535" cy="658368"/>
+          </a:xfrm>
+          <a:prstGeom prst="rect">
+            <a:avLst/>
+          </a:prstGeom>
+          <a:noFill/>
+          <a:ln/>
+        </p:spPr>
+        <p:txBody>
+          <a:bodyPr wrap="square" lIns="0" tIns="0" rIns="0" bIns="0" rtlCol="0" anchor="ctr"/>
+          <a:lstStyle/>
+          <a:p>
+            <a:pPr algn="l" indent="0" marL="0">
+              <a:buNone/>
+            </a:pPr>
+            <a:r>
+              <a:rPr lang="en-US" sz="3400" b="1" dirty="0">
+                <a:solidFill>
+                  <a:srgbClr val="0F2E22"/>
+                </a:solidFill>
+                <a:latin typeface="Microsoft JhengHei" pitchFamily="34" charset="0"/>
+                <a:ea typeface="Microsoft JhengHei" pitchFamily="34" charset="-122"/>
+                <a:cs typeface="Microsoft JhengHei" pitchFamily="34" charset="-120"/>
+              </a:rPr>
               <a:t>歷史訓練成果總覽　test split</a:t>
             </a:r>
             <a:endParaRPr lang="en-US" sz="3400" dirty="0"/>
@@ -3698,7 +5867,7 @@
       </p:sp>
       <p:graphicFrame>
         <p:nvGraphicFramePr>
-          <p:cNvPr id="13" name="Table 0"/>
+          <p:cNvPr id="15" name="Table 0"/>
           <p:cNvGraphicFramePr>
             <a:graphicFrameLocks noGrp="1"/>
           </p:cNvGraphicFramePr>
@@ -7382,9 +9551,9 @@
 </p:sld>
 </file>
 
-<file path=ppt/slides/slide13.xml><?xml version="1.0" encoding="utf-8"?>
+<file path=ppt/slides/slide15.xml><?xml version="1.0" encoding="utf-8"?>
 <p:sld xmlns:a="http://schemas.openxmlformats.org/drawingml/2006/main" xmlns:r="http://schemas.openxmlformats.org/officeDocument/2006/relationships" xmlns:p="http://schemas.openxmlformats.org/presentationml/2006/main">
-  <p:cSld name="Slide 13">
+  <p:cSld name="Slide 15">
     <p:bg>
       <p:bgPr>
         <a:solidFill>
@@ -7486,7 +9655,7 @@
       </p:sp>
       <p:graphicFrame>
         <p:nvGraphicFramePr>
-          <p:cNvPr id="14" name="Table 0"/>
+          <p:cNvPr id="16" name="Table 0"/>
           <p:cNvGraphicFramePr>
             <a:graphicFrameLocks noGrp="1"/>
           </p:cNvGraphicFramePr>
@@ -10370,9 +12539,9 @@
 </p:sld>
 </file>
 
-<file path=ppt/slides/slide14.xml><?xml version="1.0" encoding="utf-8"?>
+<file path=ppt/slides/slide16.xml><?xml version="1.0" encoding="utf-8"?>
 <p:sld xmlns:a="http://schemas.openxmlformats.org/drawingml/2006/main" xmlns:r="http://schemas.openxmlformats.org/officeDocument/2006/relationships" xmlns:p="http://schemas.openxmlformats.org/presentationml/2006/main">
-  <p:cSld name="Slide 14">
+  <p:cSld name="Slide 16">
     <p:bg>
       <p:bgPr>
         <a:solidFill>
@@ -11011,9 +13180,9 @@
 </p:sld>
 </file>
 
-<file path=ppt/slides/slide15.xml><?xml version="1.0" encoding="utf-8"?>
+<file path=ppt/slides/slide17.xml><?xml version="1.0" encoding="utf-8"?>
 <p:sld xmlns:a="http://schemas.openxmlformats.org/drawingml/2006/main" xmlns:r="http://schemas.openxmlformats.org/officeDocument/2006/relationships" xmlns:p="http://schemas.openxmlformats.org/presentationml/2006/main">
-  <p:cSld name="Slide 15">
+  <p:cSld name="Slide 17">
     <p:bg>
       <p:bgPr>
         <a:solidFill>
@@ -11115,7 +13284,7 @@
       </p:sp>
       <p:graphicFrame>
         <p:nvGraphicFramePr>
-          <p:cNvPr id="16" name="Table 0"/>
+          <p:cNvPr id="18" name="Table 0"/>
           <p:cNvGraphicFramePr>
             <a:graphicFrameLocks noGrp="1"/>
           </p:cNvGraphicFramePr>
@@ -12201,6 +14370,138 @@
                   </a:tcPr>
                 </a:tc>
               </a:tr>
+              <a:tr h="557784">
+                <a:tc>
+                  <a:txBody>
+                    <a:bodyPr/>
+                    <a:lstStyle/>
+                    <a:p>
+                      <a:pPr algn="l" indent="0" marL="0">
+                        <a:buNone/>
+                      </a:pPr>
+                      <a:r>
+                        <a:rPr lang="en-US" sz="1250" dirty="0">
+                          <a:solidFill>
+                            <a:srgbClr val="1A2620"/>
+                          </a:solidFill>
+                          <a:latin typeface="Microsoft JhengHei" pitchFamily="34" charset="0"/>
+                          <a:ea typeface="Microsoft JhengHei" pitchFamily="34" charset="-122"/>
+                          <a:cs typeface="Microsoft JhengHei" pitchFamily="34" charset="-120"/>
+                        </a:rPr>
+                        <a:t>6–7 月不是有 0.87 嗎？</a:t>
+                      </a:r>
+                      <a:endParaRPr lang="en-US" sz="1250" dirty="0">
+                        <a:latin typeface="Microsoft JhengHei" charset="0"/>
+                        <a:ea typeface="Microsoft JhengHei" charset="0"/>
+                        <a:cs typeface="Microsoft JhengHei" charset="0"/>
+                      </a:endParaRPr>
+                    </a:p>
+                  </a:txBody>
+                  <a:tcPr marL="91440" marR="91440" marT="45720" marB="45720" anchor="ctr">
+                    <a:lnL w="6350" cap="flat" cmpd="sng" algn="ctr">
+                      <a:solidFill>
+                        <a:srgbClr val="C9DCD0"/>
+                      </a:solidFill>
+                      <a:prstDash val="solid"/>
+                      <a:round/>
+                      <a:headEnd type="none" w="med" len="med"/>
+                      <a:tailEnd type="none" w="med" len="med"/>
+                    </a:lnL>
+                    <a:lnR w="6350" cap="flat" cmpd="sng" algn="ctr">
+                      <a:solidFill>
+                        <a:srgbClr val="C9DCD0"/>
+                      </a:solidFill>
+                      <a:prstDash val="solid"/>
+                      <a:round/>
+                      <a:headEnd type="none" w="med" len="med"/>
+                      <a:tailEnd type="none" w="med" len="med"/>
+                    </a:lnR>
+                    <a:lnT w="6350" cap="flat" cmpd="sng" algn="ctr">
+                      <a:solidFill>
+                        <a:srgbClr val="C9DCD0"/>
+                      </a:solidFill>
+                      <a:prstDash val="solid"/>
+                      <a:round/>
+                      <a:headEnd type="none" w="med" len="med"/>
+                      <a:tailEnd type="none" w="med" len="med"/>
+                    </a:lnT>
+                    <a:lnB w="6350" cap="flat" cmpd="sng" algn="ctr">
+                      <a:solidFill>
+                        <a:srgbClr val="C9DCD0"/>
+                      </a:solidFill>
+                      <a:prstDash val="solid"/>
+                      <a:round/>
+                      <a:headEnd type="none" w="med" len="med"/>
+                      <a:tailEnd type="none" w="med" len="med"/>
+                    </a:lnB>
+                  </a:tcPr>
+                </a:tc>
+                <a:tc>
+                  <a:txBody>
+                    <a:bodyPr/>
+                    <a:lstStyle/>
+                    <a:p>
+                      <a:pPr algn="l" indent="0" marL="0">
+                        <a:buNone/>
+                      </a:pPr>
+                      <a:r>
+                        <a:rPr lang="en-US" sz="1250" dirty="0">
+                          <a:solidFill>
+                            <a:srgbClr val="1A2620"/>
+                          </a:solidFill>
+                          <a:latin typeface="Microsoft JhengHei" pitchFamily="34" charset="0"/>
+                          <a:ea typeface="Microsoft JhengHei" pitchFamily="34" charset="-122"/>
+                          <a:cs typeface="Microsoft JhengHei" pitchFamily="34" charset="-120"/>
+                        </a:rPr>
+                        <a:t>那是 12 類資料集（含 2 個健康葉類別、2 類零標註），而且是最後一輪被標成「最優」。不同量尺，不能相減。</a:t>
+                      </a:r>
+                      <a:endParaRPr lang="en-US" sz="1250" dirty="0">
+                        <a:latin typeface="Microsoft JhengHei" charset="0"/>
+                        <a:ea typeface="Microsoft JhengHei" charset="0"/>
+                        <a:cs typeface="Microsoft JhengHei" charset="0"/>
+                      </a:endParaRPr>
+                    </a:p>
+                  </a:txBody>
+                  <a:tcPr marL="91440" marR="91440" marT="45720" marB="45720" anchor="ctr">
+                    <a:lnL w="6350" cap="flat" cmpd="sng" algn="ctr">
+                      <a:solidFill>
+                        <a:srgbClr val="C9DCD0"/>
+                      </a:solidFill>
+                      <a:prstDash val="solid"/>
+                      <a:round/>
+                      <a:headEnd type="none" w="med" len="med"/>
+                      <a:tailEnd type="none" w="med" len="med"/>
+                    </a:lnL>
+                    <a:lnR w="6350" cap="flat" cmpd="sng" algn="ctr">
+                      <a:solidFill>
+                        <a:srgbClr val="C9DCD0"/>
+                      </a:solidFill>
+                      <a:prstDash val="solid"/>
+                      <a:round/>
+                      <a:headEnd type="none" w="med" len="med"/>
+                      <a:tailEnd type="none" w="med" len="med"/>
+                    </a:lnR>
+                    <a:lnT w="6350" cap="flat" cmpd="sng" algn="ctr">
+                      <a:solidFill>
+                        <a:srgbClr val="C9DCD0"/>
+                      </a:solidFill>
+                      <a:prstDash val="solid"/>
+                      <a:round/>
+                      <a:headEnd type="none" w="med" len="med"/>
+                      <a:tailEnd type="none" w="med" len="med"/>
+                    </a:lnT>
+                    <a:lnB w="6350" cap="flat" cmpd="sng" algn="ctr">
+                      <a:solidFill>
+                        <a:srgbClr val="C9DCD0"/>
+                      </a:solidFill>
+                      <a:prstDash val="solid"/>
+                      <a:round/>
+                      <a:headEnd type="none" w="med" len="med"/>
+                      <a:tailEnd type="none" w="med" len="med"/>
+                    </a:lnB>
+                  </a:tcPr>
+                </a:tc>
+              </a:tr>
             </a:tbl>
           </a:graphicData>
         </a:graphic>
@@ -12213,9 +14514,9 @@
 </p:sld>
 </file>
 
-<file path=ppt/slides/slide16.xml><?xml version="1.0" encoding="utf-8"?>
+<file path=ppt/slides/slide18.xml><?xml version="1.0" encoding="utf-8"?>
 <p:sld xmlns:a="http://schemas.openxmlformats.org/drawingml/2006/main" xmlns:r="http://schemas.openxmlformats.org/officeDocument/2006/relationships" xmlns:p="http://schemas.openxmlformats.org/presentationml/2006/main">
-  <p:cSld name="Slide 16">
+  <p:cSld name="Slide 18">
     <p:bg>
       <p:bgPr>
         <a:solidFill>
@@ -18607,11 +20908,11 @@
         <p:spPr>
           <a:xfrm>
             <a:off x="640080" y="3977640"/>
-            <a:ext cx="10911535" cy="1371600"/>
+            <a:ext cx="10911535" cy="1755648"/>
           </a:xfrm>
           <a:prstGeom prst="roundRect">
             <a:avLst>
-              <a:gd name="adj" fmla="val 6667"/>
+              <a:gd name="adj" fmla="val 5208"/>
             </a:avLst>
           </a:prstGeom>
           <a:solidFill>
@@ -18633,8 +20934,8 @@
         </p:nvSpPr>
         <p:spPr>
           <a:xfrm>
-            <a:off x="960120" y="4187952"/>
-            <a:ext cx="10271455" cy="457200"/>
+            <a:off x="960120" y="4160520"/>
+            <a:ext cx="10271455" cy="384048"/>
           </a:xfrm>
           <a:prstGeom prst="rect">
             <a:avLst/>
@@ -18686,7 +20987,60 @@
         </p:nvSpPr>
         <p:spPr>
           <a:xfrm>
-            <a:off x="960120" y="4718304"/>
+            <a:off x="960120" y="4599432"/>
+            <a:ext cx="10271455" cy="566928"/>
+          </a:xfrm>
+          <a:prstGeom prst="rect">
+            <a:avLst/>
+          </a:prstGeom>
+          <a:noFill/>
+          <a:ln/>
+        </p:spPr>
+        <p:txBody>
+          <a:bodyPr wrap="square" lIns="0" tIns="0" rIns="0" bIns="0" rtlCol="0" anchor="ctr"/>
+          <a:lstStyle/>
+          <a:p>
+            <a:pPr indent="0" marL="0">
+              <a:buNone/>
+            </a:pPr>
+            <a:r>
+              <a:rPr lang="en-US" sz="1400" b="1" dirty="0">
+                <a:solidFill>
+                  <a:srgbClr val="0F2E22"/>
+                </a:solidFill>
+                <a:latin typeface="Microsoft JhengHei" pitchFamily="34" charset="0"/>
+                <a:ea typeface="Microsoft JhengHei" pitchFamily="34" charset="-122"/>
+                <a:cs typeface="Microsoft JhengHei" pitchFamily="34" charset="-120"/>
+              </a:rPr>
+              <a:t>本週新查到：</a:t>
+            </a:r>
+            <a:pPr indent="0" marL="0">
+              <a:buNone/>
+            </a:pPr>
+            <a:r>
+              <a:rPr lang="en-US" sz="1400" dirty="0">
+                <a:solidFill>
+                  <a:srgbClr val="1A2620"/>
+                </a:solidFill>
+                <a:latin typeface="Microsoft JhengHei" pitchFamily="34" charset="0"/>
+                <a:ea typeface="Microsoft JhengHei" pitchFamily="34" charset="-122"/>
+                <a:cs typeface="Microsoft JhengHei" pitchFamily="34" charset="-120"/>
+              </a:rPr>
+              <a:t>Thrips_Damage 在 2026-06 就有類別代號，但 train / valid / test 全部零標註 —— 它是九類裡唯一從零開始、最晚建立的類別。</a:t>
+            </a:r>
+            <a:endParaRPr lang="en-US" sz="1400" dirty="0"/>
+          </a:p>
+        </p:txBody>
+      </p:sp>
+      <p:sp>
+        <p:nvSpPr>
+          <p:cNvPr id="11" name="Text 8"/>
+          <p:cNvSpPr txBox="1"/>
+          <p:nvPr/>
+        </p:nvSpPr>
+        <p:spPr>
+          <a:xfrm>
+            <a:off x="960120" y="5193792"/>
             <a:ext cx="10271455" cy="411480"/>
           </a:xfrm>
           <a:prstGeom prst="rect">
